--- a/talk/disordered_non-collinear_magnet.pptx
+++ b/talk/disordered_non-collinear_magnet.pptx
@@ -157,7 +157,7 @@
           <inkml:channelProperty channel="Y" name="resolution" value="1000" units="1/cm"/>
         </inkml:channelProperties>
       </inkml:inkSource>
-      <inkml:timestamp xml:id="ts0" timeString="2017-12-30T17:27:26.602"/>
+      <inkml:timestamp xml:id="ts0" timeString="2017-12-30T17:27:26.601"/>
     </inkml:context>
     <inkml:brush xml:id="br0">
       <inkml:brushProperty name="width" value="0.05" units="cm"/>
@@ -166,68 +166,68 @@
   </inkml:definitions>
   <inkml:trace contextRef="#ctx0" brushRef="#br0">4551 1677,'-10'14</inkml:trace>
   <inkml:trace contextRef="#ctx0" brushRef="#br0" timeOffset="1">4528 1709,'-8'11</inkml:trace>
-  <inkml:trace contextRef="#ctx0" brushRef="#br0" timeOffset="-1">4518 1723,'-2'3</inkml:trace>
-  <inkml:trace contextRef="#ctx0" brushRef="#br0" timeOffset="-3">4516 1726,'-1'1</inkml:trace>
+  <inkml:trace contextRef="#ctx0" brushRef="#br0">4518 1723,'-2'3</inkml:trace>
+  <inkml:trace contextRef="#ctx0" brushRef="#br0">4516 1726,'-1'1</inkml:trace>
   <inkml:trace contextRef="#ctx0" brushRef="#br0" timeOffset="16708.0284">4492 1756,'-4'5</inkml:trace>
   <inkml:trace contextRef="#ctx0" brushRef="#br0" timeOffset="16709.0284">4487 1762,'-1'1</inkml:trace>
   <inkml:trace contextRef="#ctx0" brushRef="#br0" timeOffset="16706.0284">4386 1883,'-4'5</inkml:trace>
   <inkml:trace contextRef="#ctx0" brushRef="#br0" timeOffset="16707.0284">4381 1889,'-6'7</inkml:trace>
-  <inkml:trace contextRef="#ctx0" brushRef="#br0" timeOffset="-11">4358 1914,'-12'12</inkml:trace>
+  <inkml:trace contextRef="#ctx0" brushRef="#br0">4358 1914,'-12'12</inkml:trace>
   <inkml:trace contextRef="#ctx0" brushRef="#br0" timeOffset="18127.773">4339 1933,'-52'53,"-37"21,3-8,-1-10,4-8,6-3,4-2,0-5,1-2,-3-3,-5-1,0-6,-2-2,3 0,-2-4,2-1,-1-2,-8 0,-6 3,-2-1,-1 0,0 8,-5 5,-1 8,-5 7,-4 7,-6 4,3 9,3 4,6 0,5-7,3-3,2-2,7-5,9-1,6 1,0 1,2 3,3 2,2 7,-4 8,0 1,2 5,1 9,2 6,1 7,7 9,7 10,3 7,3 8,4 7,4 6,3 4,2 3,1 6,5 2,8 0,7-1,10-3,6-1,7-7,6-8,12-7,11-7,9-3,7-2,4-7,3-8,6-6,2-5,10-4,7-8,10-2,9-5,8-6,0-6,2-2,1-4,9-5,2-4,1-4,6-6,-1-6,5-2,4-9,-1-3,-4-6,1-5,4-11,3-6,3-7,3-7,7-6,3-10,0-4,-1-6,-2-7,-1-5,-7-3,-8-4,-2 5,2 2,-3 4,1 0,-2 5,1 4,-2 10,-3 10,-10 4,-9 10,-5 7,1 4,-3 1,0 6,-2 1,1 4,-1 6,-4-2,2-3,-2 1,-2-2,-8-3,-10-5,-3-2,-5-7,6-4,5-5,8-7,5-10,5-11,7-9,6-8,3-9,-3-4,0-7,-5-6,-5 1,-5-2,0-9,-1-3,-1-2,-9 0,-3-5,-7-1,-6 1,-6-3,-5 1,-2-4,-2 1,0-2,-1-4,-5-4,-6-4,-13-1,-6-2,-9-6,-3-2,-4-6,-6 1,3-4,-3-4,4 1,-1-1,-2-2,2 2,0 5,-3 5,-8 4,-4 4,-7 7,-2-3,-4-1,-5-6,1-2,0 0,-4-4,3 0,0 2,-2 8,-2 10,-3 14,-7 3,-2 2,-1 3,-5 0,-5 2,-11 5,-6 1,-2 6,-1 0,1 3,1 4,1 4,0-1,2 5,0 3,-5 2,-1 6,-6 2,-5 4,-1 0,4 3,-1-1,1 1,-2 5,-3-3,-4 1,-3 8,-3 5,-1 2,-7 6,-2 6,1 6,-5 5,1 4,1 1,3 1,3 0,1 0,2 5,1 2,0-1,0-1,6 3,7 1,6-2,1 3,1 5,-2 0,1 3,2 3,2-2,4 1,1-4,1 2,7 2,2 3,5-2,0 5,4-2,-2 1,3 6,-2-2,1-2,4 1,3 1,4-1,7 2,3 0,6 0,0 0,-1 1,3-6,3-2,0 1,-3 1,0 7,-1-3,12-17</inkml:trace>
   <inkml:trace contextRef="#ctx0" brushRef="#br0" timeOffset="18128.773">5082 876,'-9'18</inkml:trace>
   <inkml:trace contextRef="#ctx0" brushRef="#br0" timeOffset="18126.773">5069 904,'-8'16</inkml:trace>
   <inkml:trace contextRef="#ctx0" brushRef="#br0" timeOffset="18123.773">5041 957,'-5'9</inkml:trace>
   <inkml:trace contextRef="#ctx0" brushRef="#br0" timeOffset="18108.9607">5034 971,'-7'9</inkml:trace>
   <inkml:trace contextRef="#ctx0" brushRef="#br0" timeOffset="18107.9607">5027 981,'-17'25,"-10"15,3 0,20-34</inkml:trace>
-  <inkml:trace contextRef="#ctx0" brushRef="#br0" timeOffset="-20045.5966">4869 1225,'-1'1,"-14"16</inkml:trace>
-  <inkml:trace contextRef="#ctx0" brushRef="#br0" timeOffset="-20047.5966">4851 1245,'-2'3</inkml:trace>
-  <inkml:trace contextRef="#ctx0" brushRef="#br0" timeOffset="-20049.5966">4843 1254,'-17'22,"-4"4,4 1,5-3,-2-2,3 2,9-21</inkml:trace>
-  <inkml:trace contextRef="#ctx0" brushRef="#br0" timeOffset="-19">4526 1720,'2'-4</inkml:trace>
-  <inkml:trace contextRef="#ctx0" brushRef="#br0" timeOffset="-20">4547 1691,'1'-1</inkml:trace>
+  <inkml:trace contextRef="#ctx0" brushRef="#br0">4869 1225,'-1'1,"-14"16</inkml:trace>
+  <inkml:trace contextRef="#ctx0" brushRef="#br0">4851 1245,'-2'3</inkml:trace>
+  <inkml:trace contextRef="#ctx0" brushRef="#br0">4843 1254,'-17'22,"-4"4,4 1,5-3,-2-2,3 2,9-21</inkml:trace>
+  <inkml:trace contextRef="#ctx0" brushRef="#br0">4526 1720,'2'-4</inkml:trace>
+  <inkml:trace contextRef="#ctx0" brushRef="#br0">4547 1691,'1'-1</inkml:trace>
   <inkml:trace contextRef="#ctx0" brushRef="#br0" timeOffset="16656.9779">4552 1686,'6'-7</inkml:trace>
   <inkml:trace contextRef="#ctx0" brushRef="#br0" timeOffset="16655.9779">4563 1674,'1'-1</inkml:trace>
-  <inkml:trace contextRef="#ctx0" brushRef="#br0" timeOffset="-26">4589 1647,'1'-1</inkml:trace>
+  <inkml:trace contextRef="#ctx0" brushRef="#br0">4589 1647,'1'-1</inkml:trace>
   <inkml:trace contextRef="#ctx0" brushRef="#br0" timeOffset="16654.9779">4602 1634,'2'-2</inkml:trace>
-  <inkml:trace contextRef="#ctx0" brushRef="#br0" timeOffset="-31">4834 1317,'4'-6,"5"-6</inkml:trace>
-  <inkml:trace contextRef="#ctx0" brushRef="#br0" timeOffset="-32">4860 1280,'0'0</inkml:trace>
-  <inkml:trace contextRef="#ctx0" brushRef="#br0" timeOffset="-34">4863 1276,'4'-6</inkml:trace>
+  <inkml:trace contextRef="#ctx0" brushRef="#br0">4834 1317,'4'-6,"5"-6</inkml:trace>
+  <inkml:trace contextRef="#ctx0" brushRef="#br0">4860 1280,'0'0</inkml:trace>
+  <inkml:trace contextRef="#ctx0" brushRef="#br0">4863 1276,'4'-6</inkml:trace>
   <inkml:trace contextRef="#ctx0" brushRef="#br0" timeOffset="1614.2639">4871 1265,'4'-6</inkml:trace>
   <inkml:trace contextRef="#ctx0" brushRef="#br0" timeOffset="1613.2639">4876 1257,'1'-1</inkml:trace>
-  <inkml:trace contextRef="#ctx0" brushRef="#br0" timeOffset="-42">4986 1080,'-1'0,"-2"2</inkml:trace>
-  <inkml:trace contextRef="#ctx0" brushRef="#br0" timeOffset="-45">4585 1647,'5'-6</inkml:trace>
-  <inkml:trace contextRef="#ctx0" brushRef="#br0" timeOffset="-46">4595 1634,'7'-9,"-5"6</inkml:trace>
-  <inkml:trace contextRef="#ctx0" brushRef="#br0" timeOffset="-48">4614 1608,'3'-3</inkml:trace>
+  <inkml:trace contextRef="#ctx0" brushRef="#br0">4986 1080,'-1'0,"-2"2</inkml:trace>
+  <inkml:trace contextRef="#ctx0" brushRef="#br0">4585 1647,'5'-6</inkml:trace>
+  <inkml:trace contextRef="#ctx0" brushRef="#br0">4595 1634,'7'-9,"-5"6</inkml:trace>
+  <inkml:trace contextRef="#ctx0" brushRef="#br0">4614 1608,'3'-3</inkml:trace>
   <inkml:trace contextRef="#ctx0" brushRef="#br0" timeOffset="1596.4177">4628 1589,'9'-13</inkml:trace>
   <inkml:trace contextRef="#ctx0" brushRef="#br0" timeOffset="1597.4177">4638 1575,'1'-2,"5"-6</inkml:trace>
-  <inkml:trace contextRef="#ctx0" brushRef="#br0" timeOffset="-52">4650 1558,'0'0</inkml:trace>
-  <inkml:trace contextRef="#ctx0" brushRef="#br0" timeOffset="-54">4658 1548,'0'-1,"2"-2</inkml:trace>
-  <inkml:trace contextRef="#ctx0" brushRef="#br0" timeOffset="-56">4665 1538,'8'-13</inkml:trace>
-  <inkml:trace contextRef="#ctx0" brushRef="#br0" timeOffset="-58">4686 1509,'9'-13,"3"-3</inkml:trace>
-  <inkml:trace contextRef="#ctx0" brushRef="#br0" timeOffset="-60">4721 1463,'9'-11</inkml:trace>
-  <inkml:trace contextRef="#ctx0" brushRef="#br0" timeOffset="-62">4743 1436,'4'-5</inkml:trace>
-  <inkml:trace contextRef="#ctx0" brushRef="#br0" timeOffset="-64">4751 1426,'3'-4,"-1"2</inkml:trace>
-  <inkml:trace contextRef="#ctx0" brushRef="#br0" timeOffset="-66">4809 1343,'0'0</inkml:trace>
-  <inkml:trace contextRef="#ctx0" brushRef="#br0" timeOffset="-68">4822 1320,'6'-11,"5"-12,1 1,0-1,2 1,1 1,1-1,1-1,0 0,-11 15</inkml:trace>
-  <inkml:trace contextRef="#ctx0" brushRef="#br0" timeOffset="-70">4955 1112,'4'-6,"-3"5</inkml:trace>
-  <inkml:trace contextRef="#ctx0" brushRef="#br0" timeOffset="-72">4963 1101,'4'-5</inkml:trace>
-  <inkml:trace contextRef="#ctx0" brushRef="#br0" timeOffset="-74">4978 1082,'8'-10</inkml:trace>
+  <inkml:trace contextRef="#ctx0" brushRef="#br0">4650 1558,'0'0</inkml:trace>
+  <inkml:trace contextRef="#ctx0" brushRef="#br0">4658 1548,'0'-1,"2"-2</inkml:trace>
+  <inkml:trace contextRef="#ctx0" brushRef="#br0">4665 1538,'8'-13</inkml:trace>
+  <inkml:trace contextRef="#ctx0" brushRef="#br0">4686 1509,'9'-13,"3"-3</inkml:trace>
+  <inkml:trace contextRef="#ctx0" brushRef="#br0">4721 1463,'9'-11</inkml:trace>
+  <inkml:trace contextRef="#ctx0" brushRef="#br0">4743 1436,'4'-5</inkml:trace>
+  <inkml:trace contextRef="#ctx0" brushRef="#br0">4751 1426,'3'-4,"-1"2</inkml:trace>
+  <inkml:trace contextRef="#ctx0" brushRef="#br0">4809 1343,'0'0</inkml:trace>
+  <inkml:trace contextRef="#ctx0" brushRef="#br0">4822 1320,'6'-11,"5"-12,1 1,0-1,2 1,1 1,1-1,1-1,0 0,-11 15</inkml:trace>
+  <inkml:trace contextRef="#ctx0" brushRef="#br0">4955 1112,'4'-6,"-3"5</inkml:trace>
+  <inkml:trace contextRef="#ctx0" brushRef="#br0">4963 1101,'4'-5</inkml:trace>
+  <inkml:trace contextRef="#ctx0" brushRef="#br0">4978 1082,'8'-10</inkml:trace>
   <inkml:trace contextRef="#ctx0" brushRef="#br0" timeOffset="18060.284">5034 979,'-1'1</inkml:trace>
   <inkml:trace contextRef="#ctx0" brushRef="#br0" timeOffset="18059.284">5027 988,'-19'24,"-4"6,0 2,2-1,0 0,0 0,1 0,0-1,2 0,0-1,0 0,1-1,0 0,5-10</inkml:trace>
-  <inkml:trace contextRef="#ctx0" brushRef="#br0" timeOffset="-80">4756 1394,'-2'3,"-15"22,0 0,0-1,1-1,-1-1,0-1,2 0,0 1,1-1,-1-1,0 0,10-14</inkml:trace>
-  <inkml:trace contextRef="#ctx0" brushRef="#br0" timeOffset="-82">4564 1659,'-16'19,"5"-6</inkml:trace>
-  <inkml:trace contextRef="#ctx0" brushRef="#br0" timeOffset="-84">4528 1702,'-9'11,"-1"3</inkml:trace>
-  <inkml:trace contextRef="#ctx0" brushRef="#br0" timeOffset="-86">4492 1753,'-7'10</inkml:trace>
-  <inkml:trace contextRef="#ctx0" brushRef="#br0" timeOffset="-90">4826 1320,'8'-13,"3"-8,-9 18</inkml:trace>
-  <inkml:trace contextRef="#ctx0" brushRef="#br0" timeOffset="-92">4849 1280,'8'-14,"5"-6,-1 1,-6 10</inkml:trace>
-  <inkml:trace contextRef="#ctx0" brushRef="#br0" timeOffset="-94">4888 1218,'7'-10,"-5"7</inkml:trace>
-  <inkml:trace contextRef="#ctx0" brushRef="#br0" timeOffset="-96">4900 1201,'8'-12,"6"-9,-13 20</inkml:trace>
-  <inkml:trace contextRef="#ctx0" brushRef="#br0" timeOffset="-98">4930 1157,'4'-6</inkml:trace>
-  <inkml:trace contextRef="#ctx0" brushRef="#br0" timeOffset="-100">4938 1145,'10'-16</inkml:trace>
-  <inkml:trace contextRef="#ctx0" brushRef="#br0" timeOffset="-102">4958 1112,'2'-4</inkml:trace>
-  <inkml:trace contextRef="#ctx0" brushRef="#br0" timeOffset="-104">4965 1101,'1'-3,"0"1</inkml:trace>
-  <inkml:trace contextRef="#ctx0" brushRef="#br0" timeOffset="-106">4975 1082,'5'-9,"1"0</inkml:trace>
-  <inkml:trace contextRef="#ctx0" brushRef="#br0" timeOffset="-108">4993 1052,'1'-1</inkml:trace>
-  <inkml:trace contextRef="#ctx0" brushRef="#br0" timeOffset="-110">5002 1039,'7'-12</inkml:trace>
+  <inkml:trace contextRef="#ctx0" brushRef="#br0">4756 1394,'-2'3,"-15"22,0 0,0-1,1-1,-1-1,0-1,2 0,0 1,1-1,-1-1,0 0,10-14</inkml:trace>
+  <inkml:trace contextRef="#ctx0" brushRef="#br0">4564 1659,'-16'19,"5"-6</inkml:trace>
+  <inkml:trace contextRef="#ctx0" brushRef="#br0">4528 1702,'-9'11,"-1"3</inkml:trace>
+  <inkml:trace contextRef="#ctx0" brushRef="#br0">4492 1753,'-7'10</inkml:trace>
+  <inkml:trace contextRef="#ctx0" brushRef="#br0">4826 1320,'8'-13,"3"-8,-9 18</inkml:trace>
+  <inkml:trace contextRef="#ctx0" brushRef="#br0">4849 1280,'8'-14,"5"-6,-1 1,-6 10</inkml:trace>
+  <inkml:trace contextRef="#ctx0" brushRef="#br0">4888 1218,'7'-10,"-5"7</inkml:trace>
+  <inkml:trace contextRef="#ctx0" brushRef="#br0">4900 1201,'8'-12,"6"-9,-13 20</inkml:trace>
+  <inkml:trace contextRef="#ctx0" brushRef="#br0">4930 1157,'4'-6</inkml:trace>
+  <inkml:trace contextRef="#ctx0" brushRef="#br0">4938 1145,'10'-16</inkml:trace>
+  <inkml:trace contextRef="#ctx0" brushRef="#br0">4958 1112,'2'-4</inkml:trace>
+  <inkml:trace contextRef="#ctx0" brushRef="#br0">4965 1101,'1'-3,"0"1</inkml:trace>
+  <inkml:trace contextRef="#ctx0" brushRef="#br0">4975 1082,'5'-9,"1"0</inkml:trace>
+  <inkml:trace contextRef="#ctx0" brushRef="#br0">4993 1052,'1'-1</inkml:trace>
+  <inkml:trace contextRef="#ctx0" brushRef="#br0">5002 1039,'7'-12</inkml:trace>
   <inkml:trace contextRef="#ctx0" brushRef="#br0" timeOffset="18027.4464">5163 781,'5'-7</inkml:trace>
   <inkml:trace contextRef="#ctx0" brushRef="#br0" timeOffset="18026.4464">5171 770,'6'-9,"1"-1,1 1,-7 7</inkml:trace>
   <inkml:trace contextRef="#ctx0" brushRef="#br0" timeOffset="18024.4464">5198 735,'1'-1</inkml:trace>
@@ -361,7 +361,7 @@
           <inkml:channelProperty channel="Y" name="resolution" value="1000" units="1/cm"/>
         </inkml:channelProperties>
       </inkml:inkSource>
-      <inkml:timestamp xml:id="ts0" timeString="2017-12-30T17:27:26.602"/>
+      <inkml:timestamp xml:id="ts0" timeString="2017-12-30T17:27:26.601"/>
     </inkml:context>
     <inkml:brush xml:id="br0">
       <inkml:brushProperty name="width" value="0.05" units="cm"/>
@@ -370,68 +370,68 @@
   </inkml:definitions>
   <inkml:trace contextRef="#ctx0" brushRef="#br0">4551 1677,'-10'14</inkml:trace>
   <inkml:trace contextRef="#ctx0" brushRef="#br0" timeOffset="1">4528 1709,'-8'11</inkml:trace>
-  <inkml:trace contextRef="#ctx0" brushRef="#br0" timeOffset="-1">4518 1723,'-2'3</inkml:trace>
-  <inkml:trace contextRef="#ctx0" brushRef="#br0" timeOffset="-3">4516 1726,'-1'1</inkml:trace>
+  <inkml:trace contextRef="#ctx0" brushRef="#br0">4518 1723,'-2'3</inkml:trace>
+  <inkml:trace contextRef="#ctx0" brushRef="#br0">4516 1726,'-1'1</inkml:trace>
   <inkml:trace contextRef="#ctx0" brushRef="#br0" timeOffset="16708.0284">4492 1756,'-4'5</inkml:trace>
   <inkml:trace contextRef="#ctx0" brushRef="#br0" timeOffset="16709.0284">4487 1762,'-1'1</inkml:trace>
   <inkml:trace contextRef="#ctx0" brushRef="#br0" timeOffset="16706.0284">4386 1883,'-4'5</inkml:trace>
   <inkml:trace contextRef="#ctx0" brushRef="#br0" timeOffset="16707.0284">4381 1889,'-6'7</inkml:trace>
-  <inkml:trace contextRef="#ctx0" brushRef="#br0" timeOffset="-11">4358 1914,'-12'12</inkml:trace>
+  <inkml:trace contextRef="#ctx0" brushRef="#br0">4358 1914,'-12'12</inkml:trace>
   <inkml:trace contextRef="#ctx0" brushRef="#br0" timeOffset="18127.773">4339 1933,'-52'53,"-37"21,3-8,-1-10,4-8,6-3,4-2,0-5,1-2,-3-3,-5-1,0-6,-2-2,3 0,-2-4,2-1,-1-2,-8 0,-6 3,-2-1,-1 0,0 8,-5 5,-1 8,-5 7,-4 7,-6 4,3 9,3 4,6 0,5-7,3-3,2-2,7-5,9-1,6 1,0 1,2 3,3 2,2 7,-4 8,0 1,2 5,1 9,2 6,1 7,7 9,7 10,3 7,3 8,4 7,4 6,3 4,2 3,1 6,5 2,8 0,7-1,10-3,6-1,7-7,6-8,12-7,11-7,9-3,7-2,4-7,3-8,6-6,2-5,10-4,7-8,10-2,9-5,8-6,0-6,2-2,1-4,9-5,2-4,1-4,6-6,-1-6,5-2,4-9,-1-3,-4-6,1-5,4-11,3-6,3-7,3-7,7-6,3-10,0-4,-1-6,-2-7,-1-5,-7-3,-8-4,-2 5,2 2,-3 4,1 0,-2 5,1 4,-2 10,-3 10,-10 4,-9 10,-5 7,1 4,-3 1,0 6,-2 1,1 4,-1 6,-4-2,2-3,-2 1,-2-2,-8-3,-10-5,-3-2,-5-7,6-4,5-5,8-7,5-10,5-11,7-9,6-8,3-9,-3-4,0-7,-5-6,-5 1,-5-2,0-9,-1-3,-1-2,-9 0,-3-5,-7-1,-6 1,-6-3,-5 1,-2-4,-2 1,0-2,-1-4,-5-4,-6-4,-13-1,-6-2,-9-6,-3-2,-4-6,-6 1,3-4,-3-4,4 1,-1-1,-2-2,2 2,0 5,-3 5,-8 4,-4 4,-7 7,-2-3,-4-1,-5-6,1-2,0 0,-4-4,3 0,0 2,-2 8,-2 10,-3 14,-7 3,-2 2,-1 3,-5 0,-5 2,-11 5,-6 1,-2 6,-1 0,1 3,1 4,1 4,0-1,2 5,0 3,-5 2,-1 6,-6 2,-5 4,-1 0,4 3,-1-1,1 1,-2 5,-3-3,-4 1,-3 8,-3 5,-1 2,-7 6,-2 6,1 6,-5 5,1 4,1 1,3 1,3 0,1 0,2 5,1 2,0-1,0-1,6 3,7 1,6-2,1 3,1 5,-2 0,1 3,2 3,2-2,4 1,1-4,1 2,7 2,2 3,5-2,0 5,4-2,-2 1,3 6,-2-2,1-2,4 1,3 1,4-1,7 2,3 0,6 0,0 0,-1 1,3-6,3-2,0 1,-3 1,0 7,-1-3,12-17</inkml:trace>
   <inkml:trace contextRef="#ctx0" brushRef="#br0" timeOffset="18128.773">5082 876,'-9'18</inkml:trace>
   <inkml:trace contextRef="#ctx0" brushRef="#br0" timeOffset="18126.773">5069 904,'-8'16</inkml:trace>
   <inkml:trace contextRef="#ctx0" brushRef="#br0" timeOffset="18123.773">5041 957,'-5'9</inkml:trace>
   <inkml:trace contextRef="#ctx0" brushRef="#br0" timeOffset="18108.9607">5034 971,'-7'9</inkml:trace>
   <inkml:trace contextRef="#ctx0" brushRef="#br0" timeOffset="18107.9607">5027 981,'-17'25,"-10"15,3 0,20-34</inkml:trace>
-  <inkml:trace contextRef="#ctx0" brushRef="#br0" timeOffset="-20045.5966">4869 1225,'-1'1,"-14"16</inkml:trace>
-  <inkml:trace contextRef="#ctx0" brushRef="#br0" timeOffset="-20047.5966">4851 1245,'-2'3</inkml:trace>
-  <inkml:trace contextRef="#ctx0" brushRef="#br0" timeOffset="-20049.5966">4843 1254,'-17'22,"-4"4,4 1,5-3,-2-2,3 2,9-21</inkml:trace>
-  <inkml:trace contextRef="#ctx0" brushRef="#br0" timeOffset="-19">4526 1720,'2'-4</inkml:trace>
-  <inkml:trace contextRef="#ctx0" brushRef="#br0" timeOffset="-20">4547 1691,'1'-1</inkml:trace>
+  <inkml:trace contextRef="#ctx0" brushRef="#br0">4869 1225,'-1'1,"-14"16</inkml:trace>
+  <inkml:trace contextRef="#ctx0" brushRef="#br0">4851 1245,'-2'3</inkml:trace>
+  <inkml:trace contextRef="#ctx0" brushRef="#br0">4843 1254,'-17'22,"-4"4,4 1,5-3,-2-2,3 2,9-21</inkml:trace>
+  <inkml:trace contextRef="#ctx0" brushRef="#br0">4526 1720,'2'-4</inkml:trace>
+  <inkml:trace contextRef="#ctx0" brushRef="#br0">4547 1691,'1'-1</inkml:trace>
   <inkml:trace contextRef="#ctx0" brushRef="#br0" timeOffset="16656.9779">4552 1686,'6'-7</inkml:trace>
   <inkml:trace contextRef="#ctx0" brushRef="#br0" timeOffset="16655.9779">4563 1674,'1'-1</inkml:trace>
-  <inkml:trace contextRef="#ctx0" brushRef="#br0" timeOffset="-26">4589 1647,'1'-1</inkml:trace>
+  <inkml:trace contextRef="#ctx0" brushRef="#br0">4589 1647,'1'-1</inkml:trace>
   <inkml:trace contextRef="#ctx0" brushRef="#br0" timeOffset="16654.9779">4602 1634,'2'-2</inkml:trace>
-  <inkml:trace contextRef="#ctx0" brushRef="#br0" timeOffset="-31">4834 1317,'4'-6,"5"-6</inkml:trace>
-  <inkml:trace contextRef="#ctx0" brushRef="#br0" timeOffset="-32">4860 1280,'0'0</inkml:trace>
-  <inkml:trace contextRef="#ctx0" brushRef="#br0" timeOffset="-34">4863 1276,'4'-6</inkml:trace>
+  <inkml:trace contextRef="#ctx0" brushRef="#br0">4834 1317,'4'-6,"5"-6</inkml:trace>
+  <inkml:trace contextRef="#ctx0" brushRef="#br0">4860 1280,'0'0</inkml:trace>
+  <inkml:trace contextRef="#ctx0" brushRef="#br0">4863 1276,'4'-6</inkml:trace>
   <inkml:trace contextRef="#ctx0" brushRef="#br0" timeOffset="1614.2639">4871 1265,'4'-6</inkml:trace>
   <inkml:trace contextRef="#ctx0" brushRef="#br0" timeOffset="1613.2639">4876 1257,'1'-1</inkml:trace>
-  <inkml:trace contextRef="#ctx0" brushRef="#br0" timeOffset="-42">4986 1080,'-1'0,"-2"2</inkml:trace>
-  <inkml:trace contextRef="#ctx0" brushRef="#br0" timeOffset="-45">4585 1647,'5'-6</inkml:trace>
-  <inkml:trace contextRef="#ctx0" brushRef="#br0" timeOffset="-46">4595 1634,'7'-9,"-5"6</inkml:trace>
-  <inkml:trace contextRef="#ctx0" brushRef="#br0" timeOffset="-48">4614 1608,'3'-3</inkml:trace>
+  <inkml:trace contextRef="#ctx0" brushRef="#br0">4986 1080,'-1'0,"-2"2</inkml:trace>
+  <inkml:trace contextRef="#ctx0" brushRef="#br0">4585 1647,'5'-6</inkml:trace>
+  <inkml:trace contextRef="#ctx0" brushRef="#br0">4595 1634,'7'-9,"-5"6</inkml:trace>
+  <inkml:trace contextRef="#ctx0" brushRef="#br0">4614 1608,'3'-3</inkml:trace>
   <inkml:trace contextRef="#ctx0" brushRef="#br0" timeOffset="1596.4177">4628 1589,'9'-13</inkml:trace>
   <inkml:trace contextRef="#ctx0" brushRef="#br0" timeOffset="1597.4177">4638 1575,'1'-2,"5"-6</inkml:trace>
-  <inkml:trace contextRef="#ctx0" brushRef="#br0" timeOffset="-52">4650 1558,'0'0</inkml:trace>
-  <inkml:trace contextRef="#ctx0" brushRef="#br0" timeOffset="-54">4658 1548,'0'-1,"2"-2</inkml:trace>
-  <inkml:trace contextRef="#ctx0" brushRef="#br0" timeOffset="-56">4665 1538,'8'-13</inkml:trace>
-  <inkml:trace contextRef="#ctx0" brushRef="#br0" timeOffset="-58">4686 1509,'9'-13,"3"-3</inkml:trace>
-  <inkml:trace contextRef="#ctx0" brushRef="#br0" timeOffset="-60">4721 1463,'9'-11</inkml:trace>
-  <inkml:trace contextRef="#ctx0" brushRef="#br0" timeOffset="-62">4743 1436,'4'-5</inkml:trace>
-  <inkml:trace contextRef="#ctx0" brushRef="#br0" timeOffset="-64">4751 1426,'3'-4,"-1"2</inkml:trace>
-  <inkml:trace contextRef="#ctx0" brushRef="#br0" timeOffset="-66">4809 1343,'0'0</inkml:trace>
-  <inkml:trace contextRef="#ctx0" brushRef="#br0" timeOffset="-68">4822 1320,'6'-11,"5"-12,1 1,0-1,2 1,1 1,1-1,1-1,0 0,-11 15</inkml:trace>
-  <inkml:trace contextRef="#ctx0" brushRef="#br0" timeOffset="-70">4955 1112,'4'-6,"-3"5</inkml:trace>
-  <inkml:trace contextRef="#ctx0" brushRef="#br0" timeOffset="-72">4963 1101,'4'-5</inkml:trace>
-  <inkml:trace contextRef="#ctx0" brushRef="#br0" timeOffset="-74">4978 1082,'8'-10</inkml:trace>
+  <inkml:trace contextRef="#ctx0" brushRef="#br0">4650 1558,'0'0</inkml:trace>
+  <inkml:trace contextRef="#ctx0" brushRef="#br0">4658 1548,'0'-1,"2"-2</inkml:trace>
+  <inkml:trace contextRef="#ctx0" brushRef="#br0">4665 1538,'8'-13</inkml:trace>
+  <inkml:trace contextRef="#ctx0" brushRef="#br0">4686 1509,'9'-13,"3"-3</inkml:trace>
+  <inkml:trace contextRef="#ctx0" brushRef="#br0">4721 1463,'9'-11</inkml:trace>
+  <inkml:trace contextRef="#ctx0" brushRef="#br0">4743 1436,'4'-5</inkml:trace>
+  <inkml:trace contextRef="#ctx0" brushRef="#br0">4751 1426,'3'-4,"-1"2</inkml:trace>
+  <inkml:trace contextRef="#ctx0" brushRef="#br0">4809 1343,'0'0</inkml:trace>
+  <inkml:trace contextRef="#ctx0" brushRef="#br0">4822 1320,'6'-11,"5"-12,1 1,0-1,2 1,1 1,1-1,1-1,0 0,-11 15</inkml:trace>
+  <inkml:trace contextRef="#ctx0" brushRef="#br0">4955 1112,'4'-6,"-3"5</inkml:trace>
+  <inkml:trace contextRef="#ctx0" brushRef="#br0">4963 1101,'4'-5</inkml:trace>
+  <inkml:trace contextRef="#ctx0" brushRef="#br0">4978 1082,'8'-10</inkml:trace>
   <inkml:trace contextRef="#ctx0" brushRef="#br0" timeOffset="18060.284">5034 979,'-1'1</inkml:trace>
   <inkml:trace contextRef="#ctx0" brushRef="#br0" timeOffset="18059.284">5027 988,'-19'24,"-4"6,0 2,2-1,0 0,0 0,1 0,0-1,2 0,0-1,0 0,1-1,0 0,5-10</inkml:trace>
-  <inkml:trace contextRef="#ctx0" brushRef="#br0" timeOffset="-80">4756 1394,'-2'3,"-15"22,0 0,0-1,1-1,-1-1,0-1,2 0,0 1,1-1,-1-1,0 0,10-14</inkml:trace>
-  <inkml:trace contextRef="#ctx0" brushRef="#br0" timeOffset="-82">4564 1659,'-16'19,"5"-6</inkml:trace>
-  <inkml:trace contextRef="#ctx0" brushRef="#br0" timeOffset="-84">4528 1702,'-9'11,"-1"3</inkml:trace>
-  <inkml:trace contextRef="#ctx0" brushRef="#br0" timeOffset="-86">4492 1753,'-7'10</inkml:trace>
-  <inkml:trace contextRef="#ctx0" brushRef="#br0" timeOffset="-90">4826 1320,'8'-13,"3"-8,-9 18</inkml:trace>
-  <inkml:trace contextRef="#ctx0" brushRef="#br0" timeOffset="-92">4849 1280,'8'-14,"5"-6,-1 1,-6 10</inkml:trace>
-  <inkml:trace contextRef="#ctx0" brushRef="#br0" timeOffset="-94">4888 1218,'7'-10,"-5"7</inkml:trace>
-  <inkml:trace contextRef="#ctx0" brushRef="#br0" timeOffset="-96">4900 1201,'8'-12,"6"-9,-13 20</inkml:trace>
-  <inkml:trace contextRef="#ctx0" brushRef="#br0" timeOffset="-98">4930 1157,'4'-6</inkml:trace>
-  <inkml:trace contextRef="#ctx0" brushRef="#br0" timeOffset="-100">4938 1145,'10'-16</inkml:trace>
-  <inkml:trace contextRef="#ctx0" brushRef="#br0" timeOffset="-102">4958 1112,'2'-4</inkml:trace>
-  <inkml:trace contextRef="#ctx0" brushRef="#br0" timeOffset="-104">4965 1101,'1'-3,"0"1</inkml:trace>
-  <inkml:trace contextRef="#ctx0" brushRef="#br0" timeOffset="-106">4975 1082,'5'-9,"1"0</inkml:trace>
-  <inkml:trace contextRef="#ctx0" brushRef="#br0" timeOffset="-108">4993 1052,'1'-1</inkml:trace>
-  <inkml:trace contextRef="#ctx0" brushRef="#br0" timeOffset="-110">5002 1039,'7'-12</inkml:trace>
+  <inkml:trace contextRef="#ctx0" brushRef="#br0">4756 1394,'-2'3,"-15"22,0 0,0-1,1-1,-1-1,0-1,2 0,0 1,1-1,-1-1,0 0,10-14</inkml:trace>
+  <inkml:trace contextRef="#ctx0" brushRef="#br0">4564 1659,'-16'19,"5"-6</inkml:trace>
+  <inkml:trace contextRef="#ctx0" brushRef="#br0">4528 1702,'-9'11,"-1"3</inkml:trace>
+  <inkml:trace contextRef="#ctx0" brushRef="#br0">4492 1753,'-7'10</inkml:trace>
+  <inkml:trace contextRef="#ctx0" brushRef="#br0">4826 1320,'8'-13,"3"-8,-9 18</inkml:trace>
+  <inkml:trace contextRef="#ctx0" brushRef="#br0">4849 1280,'8'-14,"5"-6,-1 1,-6 10</inkml:trace>
+  <inkml:trace contextRef="#ctx0" brushRef="#br0">4888 1218,'7'-10,"-5"7</inkml:trace>
+  <inkml:trace contextRef="#ctx0" brushRef="#br0">4900 1201,'8'-12,"6"-9,-13 20</inkml:trace>
+  <inkml:trace contextRef="#ctx0" brushRef="#br0">4930 1157,'4'-6</inkml:trace>
+  <inkml:trace contextRef="#ctx0" brushRef="#br0">4938 1145,'10'-16</inkml:trace>
+  <inkml:trace contextRef="#ctx0" brushRef="#br0">4958 1112,'2'-4</inkml:trace>
+  <inkml:trace contextRef="#ctx0" brushRef="#br0">4965 1101,'1'-3,"0"1</inkml:trace>
+  <inkml:trace contextRef="#ctx0" brushRef="#br0">4975 1082,'5'-9,"1"0</inkml:trace>
+  <inkml:trace contextRef="#ctx0" brushRef="#br0">4993 1052,'1'-1</inkml:trace>
+  <inkml:trace contextRef="#ctx0" brushRef="#br0">5002 1039,'7'-12</inkml:trace>
   <inkml:trace contextRef="#ctx0" brushRef="#br0" timeOffset="18027.4464">5163 781,'5'-7</inkml:trace>
   <inkml:trace contextRef="#ctx0" brushRef="#br0" timeOffset="18026.4464">5171 770,'6'-9,"1"-1,1 1,-7 7</inkml:trace>
   <inkml:trace contextRef="#ctx0" brushRef="#br0" timeOffset="18024.4464">5198 735,'1'-1</inkml:trace>
@@ -565,7 +565,7 @@
           <inkml:channelProperty channel="Y" name="resolution" value="1000" units="1/cm"/>
         </inkml:channelProperties>
       </inkml:inkSource>
-      <inkml:timestamp xml:id="ts0" timeString="2017-12-30T17:27:26.602"/>
+      <inkml:timestamp xml:id="ts0" timeString="2017-12-30T17:27:26.601"/>
     </inkml:context>
     <inkml:brush xml:id="br0">
       <inkml:brushProperty name="width" value="0.05" units="cm"/>
@@ -574,68 +574,68 @@
   </inkml:definitions>
   <inkml:trace contextRef="#ctx0" brushRef="#br0">4551 1677,'-10'14</inkml:trace>
   <inkml:trace contextRef="#ctx0" brushRef="#br0" timeOffset="1">4528 1709,'-8'11</inkml:trace>
-  <inkml:trace contextRef="#ctx0" brushRef="#br0" timeOffset="-1">4518 1723,'-2'3</inkml:trace>
-  <inkml:trace contextRef="#ctx0" brushRef="#br0" timeOffset="-3">4516 1726,'-1'1</inkml:trace>
+  <inkml:trace contextRef="#ctx0" brushRef="#br0">4518 1723,'-2'3</inkml:trace>
+  <inkml:trace contextRef="#ctx0" brushRef="#br0">4516 1726,'-1'1</inkml:trace>
   <inkml:trace contextRef="#ctx0" brushRef="#br0" timeOffset="16708.0284">4492 1756,'-4'5</inkml:trace>
   <inkml:trace contextRef="#ctx0" brushRef="#br0" timeOffset="16709.0284">4487 1762,'-1'1</inkml:trace>
   <inkml:trace contextRef="#ctx0" brushRef="#br0" timeOffset="16706.0284">4386 1883,'-4'5</inkml:trace>
   <inkml:trace contextRef="#ctx0" brushRef="#br0" timeOffset="16707.0284">4381 1889,'-6'7</inkml:trace>
-  <inkml:trace contextRef="#ctx0" brushRef="#br0" timeOffset="-11">4358 1914,'-12'12</inkml:trace>
+  <inkml:trace contextRef="#ctx0" brushRef="#br0">4358 1914,'-12'12</inkml:trace>
   <inkml:trace contextRef="#ctx0" brushRef="#br0" timeOffset="18127.773">4339 1933,'-52'53,"-37"21,3-8,-1-10,4-8,6-3,4-2,0-5,1-2,-3-3,-5-1,0-6,-2-2,3 0,-2-4,2-1,-1-2,-8 0,-6 3,-2-1,-1 0,0 8,-5 5,-1 8,-5 7,-4 7,-6 4,3 9,3 4,6 0,5-7,3-3,2-2,7-5,9-1,6 1,0 1,2 3,3 2,2 7,-4 8,0 1,2 5,1 9,2 6,1 7,7 9,7 10,3 7,3 8,4 7,4 6,3 4,2 3,1 6,5 2,8 0,7-1,10-3,6-1,7-7,6-8,12-7,11-7,9-3,7-2,4-7,3-8,6-6,2-5,10-4,7-8,10-2,9-5,8-6,0-6,2-2,1-4,9-5,2-4,1-4,6-6,-1-6,5-2,4-9,-1-3,-4-6,1-5,4-11,3-6,3-7,3-7,7-6,3-10,0-4,-1-6,-2-7,-1-5,-7-3,-8-4,-2 5,2 2,-3 4,1 0,-2 5,1 4,-2 10,-3 10,-10 4,-9 10,-5 7,1 4,-3 1,0 6,-2 1,1 4,-1 6,-4-2,2-3,-2 1,-2-2,-8-3,-10-5,-3-2,-5-7,6-4,5-5,8-7,5-10,5-11,7-9,6-8,3-9,-3-4,0-7,-5-6,-5 1,-5-2,0-9,-1-3,-1-2,-9 0,-3-5,-7-1,-6 1,-6-3,-5 1,-2-4,-2 1,0-2,-1-4,-5-4,-6-4,-13-1,-6-2,-9-6,-3-2,-4-6,-6 1,3-4,-3-4,4 1,-1-1,-2-2,2 2,0 5,-3 5,-8 4,-4 4,-7 7,-2-3,-4-1,-5-6,1-2,0 0,-4-4,3 0,0 2,-2 8,-2 10,-3 14,-7 3,-2 2,-1 3,-5 0,-5 2,-11 5,-6 1,-2 6,-1 0,1 3,1 4,1 4,0-1,2 5,0 3,-5 2,-1 6,-6 2,-5 4,-1 0,4 3,-1-1,1 1,-2 5,-3-3,-4 1,-3 8,-3 5,-1 2,-7 6,-2 6,1 6,-5 5,1 4,1 1,3 1,3 0,1 0,2 5,1 2,0-1,0-1,6 3,7 1,6-2,1 3,1 5,-2 0,1 3,2 3,2-2,4 1,1-4,1 2,7 2,2 3,5-2,0 5,4-2,-2 1,3 6,-2-2,1-2,4 1,3 1,4-1,7 2,3 0,6 0,0 0,-1 1,3-6,3-2,0 1,-3 1,0 7,-1-3,12-17</inkml:trace>
   <inkml:trace contextRef="#ctx0" brushRef="#br0" timeOffset="18128.773">5082 876,'-9'18</inkml:trace>
   <inkml:trace contextRef="#ctx0" brushRef="#br0" timeOffset="18126.773">5069 904,'-8'16</inkml:trace>
   <inkml:trace contextRef="#ctx0" brushRef="#br0" timeOffset="18123.773">5041 957,'-5'9</inkml:trace>
   <inkml:trace contextRef="#ctx0" brushRef="#br0" timeOffset="18108.9607">5034 971,'-7'9</inkml:trace>
   <inkml:trace contextRef="#ctx0" brushRef="#br0" timeOffset="18107.9607">5027 981,'-17'25,"-10"15,3 0,20-34</inkml:trace>
-  <inkml:trace contextRef="#ctx0" brushRef="#br0" timeOffset="-20045.5966">4869 1225,'-1'1,"-14"16</inkml:trace>
-  <inkml:trace contextRef="#ctx0" brushRef="#br0" timeOffset="-20047.5966">4851 1245,'-2'3</inkml:trace>
-  <inkml:trace contextRef="#ctx0" brushRef="#br0" timeOffset="-20049.5966">4843 1254,'-17'22,"-4"4,4 1,5-3,-2-2,3 2,9-21</inkml:trace>
-  <inkml:trace contextRef="#ctx0" brushRef="#br0" timeOffset="-19">4526 1720,'2'-4</inkml:trace>
-  <inkml:trace contextRef="#ctx0" brushRef="#br0" timeOffset="-20">4547 1691,'1'-1</inkml:trace>
+  <inkml:trace contextRef="#ctx0" brushRef="#br0">4869 1225,'-1'1,"-14"16</inkml:trace>
+  <inkml:trace contextRef="#ctx0" brushRef="#br0">4851 1245,'-2'3</inkml:trace>
+  <inkml:trace contextRef="#ctx0" brushRef="#br0">4843 1254,'-17'22,"-4"4,4 1,5-3,-2-2,3 2,9-21</inkml:trace>
+  <inkml:trace contextRef="#ctx0" brushRef="#br0">4526 1720,'2'-4</inkml:trace>
+  <inkml:trace contextRef="#ctx0" brushRef="#br0">4547 1691,'1'-1</inkml:trace>
   <inkml:trace contextRef="#ctx0" brushRef="#br0" timeOffset="16656.9779">4552 1686,'6'-7</inkml:trace>
   <inkml:trace contextRef="#ctx0" brushRef="#br0" timeOffset="16655.9779">4563 1674,'1'-1</inkml:trace>
-  <inkml:trace contextRef="#ctx0" brushRef="#br0" timeOffset="-26">4589 1647,'1'-1</inkml:trace>
+  <inkml:trace contextRef="#ctx0" brushRef="#br0">4589 1647,'1'-1</inkml:trace>
   <inkml:trace contextRef="#ctx0" brushRef="#br0" timeOffset="16654.9779">4602 1634,'2'-2</inkml:trace>
-  <inkml:trace contextRef="#ctx0" brushRef="#br0" timeOffset="-31">4834 1317,'4'-6,"5"-6</inkml:trace>
-  <inkml:trace contextRef="#ctx0" brushRef="#br0" timeOffset="-32">4860 1280,'0'0</inkml:trace>
-  <inkml:trace contextRef="#ctx0" brushRef="#br0" timeOffset="-34">4863 1276,'4'-6</inkml:trace>
+  <inkml:trace contextRef="#ctx0" brushRef="#br0">4834 1317,'4'-6,"5"-6</inkml:trace>
+  <inkml:trace contextRef="#ctx0" brushRef="#br0">4860 1280,'0'0</inkml:trace>
+  <inkml:trace contextRef="#ctx0" brushRef="#br0">4863 1276,'4'-6</inkml:trace>
   <inkml:trace contextRef="#ctx0" brushRef="#br0" timeOffset="1614.2639">4871 1265,'4'-6</inkml:trace>
   <inkml:trace contextRef="#ctx0" brushRef="#br0" timeOffset="1613.2639">4876 1257,'1'-1</inkml:trace>
-  <inkml:trace contextRef="#ctx0" brushRef="#br0" timeOffset="-42">4986 1080,'-1'0,"-2"2</inkml:trace>
-  <inkml:trace contextRef="#ctx0" brushRef="#br0" timeOffset="-45">4585 1647,'5'-6</inkml:trace>
-  <inkml:trace contextRef="#ctx0" brushRef="#br0" timeOffset="-46">4595 1634,'7'-9,"-5"6</inkml:trace>
-  <inkml:trace contextRef="#ctx0" brushRef="#br0" timeOffset="-48">4614 1608,'3'-3</inkml:trace>
+  <inkml:trace contextRef="#ctx0" brushRef="#br0">4986 1080,'-1'0,"-2"2</inkml:trace>
+  <inkml:trace contextRef="#ctx0" brushRef="#br0">4585 1647,'5'-6</inkml:trace>
+  <inkml:trace contextRef="#ctx0" brushRef="#br0">4595 1634,'7'-9,"-5"6</inkml:trace>
+  <inkml:trace contextRef="#ctx0" brushRef="#br0">4614 1608,'3'-3</inkml:trace>
   <inkml:trace contextRef="#ctx0" brushRef="#br0" timeOffset="1596.4177">4628 1589,'9'-13</inkml:trace>
   <inkml:trace contextRef="#ctx0" brushRef="#br0" timeOffset="1597.4177">4638 1575,'1'-2,"5"-6</inkml:trace>
-  <inkml:trace contextRef="#ctx0" brushRef="#br0" timeOffset="-52">4650 1558,'0'0</inkml:trace>
-  <inkml:trace contextRef="#ctx0" brushRef="#br0" timeOffset="-54">4658 1548,'0'-1,"2"-2</inkml:trace>
-  <inkml:trace contextRef="#ctx0" brushRef="#br0" timeOffset="-56">4665 1538,'8'-13</inkml:trace>
-  <inkml:trace contextRef="#ctx0" brushRef="#br0" timeOffset="-58">4686 1509,'9'-13,"3"-3</inkml:trace>
-  <inkml:trace contextRef="#ctx0" brushRef="#br0" timeOffset="-60">4721 1463,'9'-11</inkml:trace>
-  <inkml:trace contextRef="#ctx0" brushRef="#br0" timeOffset="-62">4743 1436,'4'-5</inkml:trace>
-  <inkml:trace contextRef="#ctx0" brushRef="#br0" timeOffset="-64">4751 1426,'3'-4,"-1"2</inkml:trace>
-  <inkml:trace contextRef="#ctx0" brushRef="#br0" timeOffset="-66">4809 1343,'0'0</inkml:trace>
-  <inkml:trace contextRef="#ctx0" brushRef="#br0" timeOffset="-68">4822 1320,'6'-11,"5"-12,1 1,0-1,2 1,1 1,1-1,1-1,0 0,-11 15</inkml:trace>
-  <inkml:trace contextRef="#ctx0" brushRef="#br0" timeOffset="-70">4955 1112,'4'-6,"-3"5</inkml:trace>
-  <inkml:trace contextRef="#ctx0" brushRef="#br0" timeOffset="-72">4963 1101,'4'-5</inkml:trace>
-  <inkml:trace contextRef="#ctx0" brushRef="#br0" timeOffset="-74">4978 1082,'8'-10</inkml:trace>
+  <inkml:trace contextRef="#ctx0" brushRef="#br0">4650 1558,'0'0</inkml:trace>
+  <inkml:trace contextRef="#ctx0" brushRef="#br0">4658 1548,'0'-1,"2"-2</inkml:trace>
+  <inkml:trace contextRef="#ctx0" brushRef="#br0">4665 1538,'8'-13</inkml:trace>
+  <inkml:trace contextRef="#ctx0" brushRef="#br0">4686 1509,'9'-13,"3"-3</inkml:trace>
+  <inkml:trace contextRef="#ctx0" brushRef="#br0">4721 1463,'9'-11</inkml:trace>
+  <inkml:trace contextRef="#ctx0" brushRef="#br0">4743 1436,'4'-5</inkml:trace>
+  <inkml:trace contextRef="#ctx0" brushRef="#br0">4751 1426,'3'-4,"-1"2</inkml:trace>
+  <inkml:trace contextRef="#ctx0" brushRef="#br0">4809 1343,'0'0</inkml:trace>
+  <inkml:trace contextRef="#ctx0" brushRef="#br0">4822 1320,'6'-11,"5"-12,1 1,0-1,2 1,1 1,1-1,1-1,0 0,-11 15</inkml:trace>
+  <inkml:trace contextRef="#ctx0" brushRef="#br0">4955 1112,'4'-6,"-3"5</inkml:trace>
+  <inkml:trace contextRef="#ctx0" brushRef="#br0">4963 1101,'4'-5</inkml:trace>
+  <inkml:trace contextRef="#ctx0" brushRef="#br0">4978 1082,'8'-10</inkml:trace>
   <inkml:trace contextRef="#ctx0" brushRef="#br0" timeOffset="18060.284">5034 979,'-1'1</inkml:trace>
   <inkml:trace contextRef="#ctx0" brushRef="#br0" timeOffset="18059.284">5027 988,'-19'24,"-4"6,0 2,2-1,0 0,0 0,1 0,0-1,2 0,0-1,0 0,1-1,0 0,5-10</inkml:trace>
-  <inkml:trace contextRef="#ctx0" brushRef="#br0" timeOffset="-80">4756 1394,'-2'3,"-15"22,0 0,0-1,1-1,-1-1,0-1,2 0,0 1,1-1,-1-1,0 0,10-14</inkml:trace>
-  <inkml:trace contextRef="#ctx0" brushRef="#br0" timeOffset="-82">4564 1659,'-16'19,"5"-6</inkml:trace>
-  <inkml:trace contextRef="#ctx0" brushRef="#br0" timeOffset="-84">4528 1702,'-9'11,"-1"3</inkml:trace>
-  <inkml:trace contextRef="#ctx0" brushRef="#br0" timeOffset="-86">4492 1753,'-7'10</inkml:trace>
-  <inkml:trace contextRef="#ctx0" brushRef="#br0" timeOffset="-90">4826 1320,'8'-13,"3"-8,-9 18</inkml:trace>
-  <inkml:trace contextRef="#ctx0" brushRef="#br0" timeOffset="-92">4849 1280,'8'-14,"5"-6,-1 1,-6 10</inkml:trace>
-  <inkml:trace contextRef="#ctx0" brushRef="#br0" timeOffset="-94">4888 1218,'7'-10,"-5"7</inkml:trace>
-  <inkml:trace contextRef="#ctx0" brushRef="#br0" timeOffset="-96">4900 1201,'8'-12,"6"-9,-13 20</inkml:trace>
-  <inkml:trace contextRef="#ctx0" brushRef="#br0" timeOffset="-98">4930 1157,'4'-6</inkml:trace>
-  <inkml:trace contextRef="#ctx0" brushRef="#br0" timeOffset="-100">4938 1145,'10'-16</inkml:trace>
-  <inkml:trace contextRef="#ctx0" brushRef="#br0" timeOffset="-102">4958 1112,'2'-4</inkml:trace>
-  <inkml:trace contextRef="#ctx0" brushRef="#br0" timeOffset="-104">4965 1101,'1'-3,"0"1</inkml:trace>
-  <inkml:trace contextRef="#ctx0" brushRef="#br0" timeOffset="-106">4975 1082,'5'-9,"1"0</inkml:trace>
-  <inkml:trace contextRef="#ctx0" brushRef="#br0" timeOffset="-108">4993 1052,'1'-1</inkml:trace>
-  <inkml:trace contextRef="#ctx0" brushRef="#br0" timeOffset="-110">5002 1039,'7'-12</inkml:trace>
+  <inkml:trace contextRef="#ctx0" brushRef="#br0">4756 1394,'-2'3,"-15"22,0 0,0-1,1-1,-1-1,0-1,2 0,0 1,1-1,-1-1,0 0,10-14</inkml:trace>
+  <inkml:trace contextRef="#ctx0" brushRef="#br0">4564 1659,'-16'19,"5"-6</inkml:trace>
+  <inkml:trace contextRef="#ctx0" brushRef="#br0">4528 1702,'-9'11,"-1"3</inkml:trace>
+  <inkml:trace contextRef="#ctx0" brushRef="#br0">4492 1753,'-7'10</inkml:trace>
+  <inkml:trace contextRef="#ctx0" brushRef="#br0">4826 1320,'8'-13,"3"-8,-9 18</inkml:trace>
+  <inkml:trace contextRef="#ctx0" brushRef="#br0">4849 1280,'8'-14,"5"-6,-1 1,-6 10</inkml:trace>
+  <inkml:trace contextRef="#ctx0" brushRef="#br0">4888 1218,'7'-10,"-5"7</inkml:trace>
+  <inkml:trace contextRef="#ctx0" brushRef="#br0">4900 1201,'8'-12,"6"-9,-13 20</inkml:trace>
+  <inkml:trace contextRef="#ctx0" brushRef="#br0">4930 1157,'4'-6</inkml:trace>
+  <inkml:trace contextRef="#ctx0" brushRef="#br0">4938 1145,'10'-16</inkml:trace>
+  <inkml:trace contextRef="#ctx0" brushRef="#br0">4958 1112,'2'-4</inkml:trace>
+  <inkml:trace contextRef="#ctx0" brushRef="#br0">4965 1101,'1'-3,"0"1</inkml:trace>
+  <inkml:trace contextRef="#ctx0" brushRef="#br0">4975 1082,'5'-9,"1"0</inkml:trace>
+  <inkml:trace contextRef="#ctx0" brushRef="#br0">4993 1052,'1'-1</inkml:trace>
+  <inkml:trace contextRef="#ctx0" brushRef="#br0">5002 1039,'7'-12</inkml:trace>
   <inkml:trace contextRef="#ctx0" brushRef="#br0" timeOffset="18027.4464">5163 781,'5'-7</inkml:trace>
   <inkml:trace contextRef="#ctx0" brushRef="#br0" timeOffset="18026.4464">5171 770,'6'-9,"1"-1,1 1,-7 7</inkml:trace>
   <inkml:trace contextRef="#ctx0" brushRef="#br0" timeOffset="18024.4464">5198 735,'1'-1</inkml:trace>
@@ -769,7 +769,7 @@
           <inkml:channelProperty channel="Y" name="resolution" value="1000" units="1/cm"/>
         </inkml:channelProperties>
       </inkml:inkSource>
-      <inkml:timestamp xml:id="ts0" timeString="2017-12-30T20:17:19.051"/>
+      <inkml:timestamp xml:id="ts0" timeString="2017-12-30T20:17:19.050"/>
     </inkml:context>
     <inkml:brush xml:id="br0">
       <inkml:brushProperty name="width" value="0.05" units="cm"/>
@@ -4725,7 +4725,7 @@
         </p:spPr>
         <p:txBody>
           <a:bodyPr>
-            <a:normAutofit fontScale="90000"/>
+            <a:normAutofit/>
           </a:bodyPr>
           <a:lstStyle/>
           <a:p>
@@ -4738,7 +4738,27 @@
                   </a:schemeClr>
                 </a:solidFill>
               </a:rPr>
-              <a:t>Quenched Bond Disorder in Frustrated Non-Collinear Magnets</a:t>
+              <a:t>Quenched Bond Disorder in </a:t>
+            </a:r>
+            <a:r>
+              <a:rPr lang="en-US" dirty="0" smtClean="0">
+                <a:solidFill>
+                  <a:schemeClr val="accent2">
+                    <a:lumMod val="50000"/>
+                  </a:schemeClr>
+                </a:solidFill>
+              </a:rPr>
+              <a:t>Non-Collinear </a:t>
+            </a:r>
+            <a:r>
+              <a:rPr lang="en-US" dirty="0">
+                <a:solidFill>
+                  <a:schemeClr val="accent2">
+                    <a:lumMod val="50000"/>
+                  </a:schemeClr>
+                </a:solidFill>
+              </a:rPr>
+              <a:t>Magnets</a:t>
             </a:r>
             <a:endParaRPr lang="x-none" dirty="0">
               <a:solidFill>
@@ -21165,8 +21185,8 @@
           </a:p>
         </p:txBody>
       </p:sp>
-      <mc:AlternateContent xmlns:mc="http://schemas.openxmlformats.org/markup-compatibility/2006">
-        <mc:Choice xmlns:a14="http://schemas.microsoft.com/office/drawing/2010/main" Requires="a14">
+      <mc:AlternateContent xmlns:mc="http://schemas.openxmlformats.org/markup-compatibility/2006" xmlns:a14="http://schemas.microsoft.com/office/drawing/2010/main">
+        <mc:Choice Requires="a14">
           <p:sp>
             <p:nvSpPr>
               <p:cNvPr id="3" name="Content Placeholder 2">
@@ -22770,7 +22790,7 @@
             </p:txBody>
           </p:sp>
         </mc:Choice>
-        <mc:Fallback>
+        <mc:Fallback xmlns="">
           <p:sp>
             <p:nvSpPr>
               <p:cNvPr id="3" name="Content Placeholder 2">
@@ -23055,8 +23075,8 @@
           </a:p>
         </p:txBody>
       </p:sp>
-      <mc:AlternateContent xmlns:mc="http://schemas.openxmlformats.org/markup-compatibility/2006">
-        <mc:Choice xmlns:a14="http://schemas.microsoft.com/office/drawing/2010/main" Requires="a14">
+      <mc:AlternateContent xmlns:mc="http://schemas.openxmlformats.org/markup-compatibility/2006" xmlns:a14="http://schemas.microsoft.com/office/drawing/2010/main">
+        <mc:Choice Requires="a14">
           <p:sp>
             <p:nvSpPr>
               <p:cNvPr id="3" name="Content Placeholder 2">
@@ -23376,7 +23396,7 @@
             </p:txBody>
           </p:sp>
         </mc:Choice>
-        <mc:Fallback>
+        <mc:Fallback xmlns="">
           <p:sp>
             <p:nvSpPr>
               <p:cNvPr id="3" name="Content Placeholder 2">
@@ -23684,7 +23704,9 @@
           </a:xfrm>
         </p:spPr>
         <p:txBody>
-          <a:bodyPr/>
+          <a:bodyPr>
+            <a:normAutofit fontScale="92500" lnSpcReduction="10000"/>
+          </a:bodyPr>
           <a:lstStyle/>
           <a:p>
             <a:pPr>
@@ -23756,8 +23778,33 @@
                   </a:schemeClr>
                 </a:solidFill>
               </a:rPr>
-              <a:t>Separate critical dimension for discrete and continuous symmetry.</a:t>
+              <a:t>Separate critical dimension for discrete and continuous symmetry</a:t>
             </a:r>
+            <a:r>
+              <a:rPr lang="en-US" dirty="0" smtClean="0">
+                <a:solidFill>
+                  <a:schemeClr val="tx1">
+                    <a:lumMod val="85000"/>
+                    <a:lumOff val="15000"/>
+                  </a:schemeClr>
+                </a:solidFill>
+              </a:rPr>
+              <a:t>.</a:t>
+            </a:r>
+          </a:p>
+          <a:p>
+            <a:pPr lvl="1">
+              <a:buFont typeface="Courier New" panose="02070309020205020404" pitchFamily="49" charset="0"/>
+              <a:buChar char="o"/>
+            </a:pPr>
+            <a:endParaRPr lang="en-US" dirty="0">
+              <a:solidFill>
+                <a:schemeClr val="tx1">
+                  <a:lumMod val="85000"/>
+                  <a:lumOff val="15000"/>
+                </a:schemeClr>
+              </a:solidFill>
+            </a:endParaRPr>
           </a:p>
           <a:p>
             <a:pPr>
@@ -23807,8 +23854,33 @@
                   </a:schemeClr>
                 </a:solidFill>
               </a:rPr>
-              <a:t>Rigid in-commensurability domains.</a:t>
+              <a:t>Rigid in-commensurability domains</a:t>
             </a:r>
+            <a:r>
+              <a:rPr lang="en-US" dirty="0" smtClean="0">
+                <a:solidFill>
+                  <a:schemeClr val="tx1">
+                    <a:lumMod val="85000"/>
+                    <a:lumOff val="15000"/>
+                  </a:schemeClr>
+                </a:solidFill>
+              </a:rPr>
+              <a:t>.</a:t>
+            </a:r>
+          </a:p>
+          <a:p>
+            <a:pPr lvl="1">
+              <a:buFont typeface="Courier New" panose="02070309020205020404" pitchFamily="49" charset="0"/>
+              <a:buChar char="o"/>
+            </a:pPr>
+            <a:endParaRPr lang="en-US" dirty="0">
+              <a:solidFill>
+                <a:schemeClr val="tx1">
+                  <a:lumMod val="85000"/>
+                  <a:lumOff val="15000"/>
+                </a:schemeClr>
+              </a:solidFill>
+            </a:endParaRPr>
           </a:p>
           <a:p>
             <a:pPr>
@@ -24269,8 +24341,8 @@
           </a:fontRef>
         </p:style>
       </p:cxnSp>
-      <mc:AlternateContent xmlns:mc="http://schemas.openxmlformats.org/markup-compatibility/2006">
-        <mc:Choice xmlns:a14="http://schemas.microsoft.com/office/drawing/2010/main" Requires="a14">
+      <mc:AlternateContent xmlns:mc="http://schemas.openxmlformats.org/markup-compatibility/2006" xmlns:a14="http://schemas.microsoft.com/office/drawing/2010/main">
+        <mc:Choice Requires="a14">
           <p:sp>
             <p:nvSpPr>
               <p:cNvPr id="5" name="TextBox 4">
@@ -24414,7 +24486,7 @@
             </p:txBody>
           </p:sp>
         </mc:Choice>
-        <mc:Fallback>
+        <mc:Fallback xmlns="">
           <p:sp>
             <p:nvSpPr>
               <p:cNvPr id="5" name="TextBox 4">
@@ -24459,8 +24531,8 @@
           </p:sp>
         </mc:Fallback>
       </mc:AlternateContent>
-      <mc:AlternateContent xmlns:mc="http://schemas.openxmlformats.org/markup-compatibility/2006">
-        <mc:Choice xmlns:a14="http://schemas.microsoft.com/office/drawing/2010/main" Requires="a14">
+      <mc:AlternateContent xmlns:mc="http://schemas.openxmlformats.org/markup-compatibility/2006" xmlns:a14="http://schemas.microsoft.com/office/drawing/2010/main">
+        <mc:Choice Requires="a14">
           <p:sp>
             <p:nvSpPr>
               <p:cNvPr id="8" name="TextBox 7"/>
@@ -24552,7 +24624,7 @@
             </p:txBody>
           </p:sp>
         </mc:Choice>
-        <mc:Fallback>
+        <mc:Fallback xmlns="">
           <p:sp>
             <p:nvSpPr>
               <p:cNvPr id="8" name="TextBox 7"/>
@@ -24621,8 +24693,8 @@
           </a:prstGeom>
         </p:spPr>
       </p:pic>
-      <mc:AlternateContent xmlns:mc="http://schemas.openxmlformats.org/markup-compatibility/2006">
-        <mc:Choice xmlns:a14="http://schemas.microsoft.com/office/drawing/2010/main" Requires="a14">
+      <mc:AlternateContent xmlns:mc="http://schemas.openxmlformats.org/markup-compatibility/2006" xmlns:a14="http://schemas.microsoft.com/office/drawing/2010/main">
+        <mc:Choice Requires="a14">
           <p:sp>
             <p:nvSpPr>
               <p:cNvPr id="10" name="TextBox 9"/>
@@ -24892,7 +24964,7 @@
             </p:txBody>
           </p:sp>
         </mc:Choice>
-        <mc:Fallback>
+        <mc:Fallback xmlns="">
           <p:sp>
             <p:nvSpPr>
               <p:cNvPr id="10" name="TextBox 9"/>
@@ -25473,8 +25545,8 @@
           </a:fontRef>
         </p:style>
       </p:cxnSp>
-      <mc:AlternateContent xmlns:mc="http://schemas.openxmlformats.org/markup-compatibility/2006">
-        <mc:Choice xmlns:a14="http://schemas.microsoft.com/office/drawing/2010/main" Requires="a14">
+      <mc:AlternateContent xmlns:mc="http://schemas.openxmlformats.org/markup-compatibility/2006" xmlns:a14="http://schemas.microsoft.com/office/drawing/2010/main">
+        <mc:Choice Requires="a14">
           <p:sp>
             <p:nvSpPr>
               <p:cNvPr id="5" name="TextBox 4">
@@ -25526,19 +25598,7 @@
                         </a:solidFill>
                         <a:latin typeface="Cambria Math" charset="0"/>
                       </a:rPr>
-                      <m:t>𝑌𝑏𝑀𝑔</m:t>
-                    </m:r>
-                    <m:r>
-                      <a:rPr lang="en-US" sz="2400" i="1">
-                        <a:solidFill>
-                          <a:schemeClr val="tx1">
-                            <a:lumMod val="50000"/>
-                            <a:lumOff val="50000"/>
-                          </a:schemeClr>
-                        </a:solidFill>
-                        <a:latin typeface="Cambria Math" charset="0"/>
-                      </a:rPr>
-                      <m:t>𝐺𝑎</m:t>
+                      <m:t>𝑌𝑏𝑀𝑔𝐺𝑎</m:t>
                     </m:r>
                     <m:sSub>
                       <m:sSubPr>
@@ -25597,7 +25657,7 @@
             </p:txBody>
           </p:sp>
         </mc:Choice>
-        <mc:Fallback>
+        <mc:Fallback xmlns="">
           <p:sp>
             <p:nvSpPr>
               <p:cNvPr id="5" name="TextBox 4">
@@ -25756,8 +25816,8 @@
           </a:p>
         </p:txBody>
       </p:sp>
-      <mc:AlternateContent xmlns:mc="http://schemas.openxmlformats.org/markup-compatibility/2006">
-        <mc:Choice xmlns:a14="http://schemas.microsoft.com/office/drawing/2010/main" Requires="a14">
+      <mc:AlternateContent xmlns:mc="http://schemas.openxmlformats.org/markup-compatibility/2006" xmlns:a14="http://schemas.microsoft.com/office/drawing/2010/main">
+        <mc:Choice Requires="a14">
           <p:sp>
             <p:nvSpPr>
               <p:cNvPr id="3" name="Content Placeholder 2">
@@ -26093,7 +26153,7 @@
             </p:txBody>
           </p:sp>
         </mc:Choice>
-        <mc:Fallback>
+        <mc:Fallback xmlns="">
           <p:sp>
             <p:nvSpPr>
               <p:cNvPr id="3" name="Content Placeholder 2">
@@ -27276,22 +27336,18 @@
           <a:lstStyle/>
           <a:p>
             <a:r>
-              <a:rPr lang="en-US" dirty="0">
-                <a:solidFill>
-                  <a:schemeClr val="accent2">
-                    <a:lumMod val="50000"/>
-                  </a:schemeClr>
-                </a:solidFill>
-              </a:rPr>
-              <a:t>Quenched Disorder: Random Fields</a:t>
+              <a:rPr lang="en-US" dirty="0"/>
+              <a:t>Random fields and the </a:t>
             </a:r>
-            <a:endParaRPr lang="x-none" dirty="0">
-              <a:solidFill>
-                <a:schemeClr val="accent2">
-                  <a:lumMod val="50000"/>
-                </a:schemeClr>
-              </a:solidFill>
-            </a:endParaRPr>
+            <a:r>
+              <a:rPr lang="en-US" dirty="0" err="1"/>
+              <a:t>Imry</a:t>
+            </a:r>
+            <a:r>
+              <a:rPr lang="en-US" dirty="0"/>
+              <a:t>-Ma criterion</a:t>
+            </a:r>
+            <a:endParaRPr lang="x-none" dirty="0"/>
           </a:p>
         </p:txBody>
       </p:sp>
@@ -27322,45 +27378,6 @@
             <p:txBody>
               <a:bodyPr/>
               <a:lstStyle/>
-              <a:p>
-                <a:pPr>
-                  <a:buFont typeface="Wingdings" panose="05000000000000000000" pitchFamily="2" charset="2"/>
-                  <a:buChar char="§"/>
-                </a:pPr>
-                <a:r>
-                  <a:rPr lang="en-US" dirty="0">
-                    <a:solidFill>
-                      <a:schemeClr val="tx1">
-                        <a:lumMod val="65000"/>
-                        <a:lumOff val="35000"/>
-                      </a:schemeClr>
-                    </a:solidFill>
-                  </a:rPr>
-                  <a:t>A simple picture with </a:t>
-                </a:r>
-                <a:r>
-                  <a:rPr lang="en-US" dirty="0" err="1">
-                    <a:solidFill>
-                      <a:schemeClr val="tx1">
-                        <a:lumMod val="65000"/>
-                        <a:lumOff val="35000"/>
-                      </a:schemeClr>
-                    </a:solidFill>
-                  </a:rPr>
-                  <a:t>Ising</a:t>
-                </a:r>
-                <a:r>
-                  <a:rPr lang="en-US" dirty="0">
-                    <a:solidFill>
-                      <a:schemeClr val="tx1">
-                        <a:lumMod val="65000"/>
-                        <a:lumOff val="35000"/>
-                      </a:schemeClr>
-                    </a:solidFill>
-                  </a:rPr>
-                  <a:t> spins:</a:t>
-                </a:r>
-              </a:p>
               <a:p>
                 <a:pPr marL="1371600" lvl="3" indent="0">
                   <a:buNone/>
@@ -27423,8 +27440,27 @@
                       </a:schemeClr>
                     </a:solidFill>
                   </a:rPr>
-                  <a:t> of random fields,</a:t>
+                  <a:t> of random fields</a:t>
                 </a:r>
+                <a:r>
+                  <a:rPr lang="en-US" sz="2000" dirty="0" smtClean="0">
+                    <a:solidFill>
+                      <a:schemeClr val="tx1">
+                        <a:lumMod val="85000"/>
+                        <a:lumOff val="15000"/>
+                      </a:schemeClr>
+                    </a:solidFill>
+                  </a:rPr>
+                  <a:t>,</a:t>
+                </a:r>
+                <a:endParaRPr lang="en-US" sz="2000" dirty="0">
+                  <a:solidFill>
+                    <a:schemeClr val="tx1">
+                      <a:lumMod val="85000"/>
+                      <a:lumOff val="15000"/>
+                    </a:schemeClr>
+                  </a:solidFill>
+                </a:endParaRPr>
               </a:p>
               <a:p>
                 <a:pPr marL="1371600" lvl="3" indent="0">
@@ -27679,7 +27715,7 @@
               <p:cNvPr id="3" name="Content Placeholder 2">
                 <a:extLst>
                   <a:ext uri="{FF2B5EF4-FFF2-40B4-BE49-F238E27FC236}">
-                    <a16:creationId xmlns:a16="http://schemas.microsoft.com/office/drawing/2014/main" id="{B02DC6DB-79AC-40CC-9EA0-71B012856EA7}"/>
+                    <a16:creationId xmlns:a16="http://schemas.microsoft.com/office/drawing/2014/main" xmlns="" xmlns:a14="http://schemas.microsoft.com/office/drawing/2010/main" id="{B02DC6DB-79AC-40CC-9EA0-71B012856EA7}"/>
                   </a:ext>
                 </a:extLst>
               </p:cNvPr>
@@ -27695,10 +27731,10 @@
                 <a:off x="838200" y="2036603"/>
                 <a:ext cx="10515600" cy="4140360"/>
               </a:xfrm>
-              <a:blipFill>
+              <a:blipFill rotWithShape="0">
                 <a:blip r:embed="rId2"/>
                 <a:stretch>
-                  <a:fillRect l="-1043" t="-2356"/>
+                  <a:fillRect/>
                 </a:stretch>
               </a:blipFill>
             </p:spPr>
@@ -27707,7 +27743,7 @@
               <a:lstStyle/>
               <a:p>
                 <a:r>
-                  <a:rPr lang="LID4096">
+                  <a:rPr lang="en-US">
                     <a:noFill/>
                   </a:rPr>
                   <a:t> </a:t>
@@ -27784,47 +27820,54 @@
           </a:bodyPr>
           <a:lstStyle/>
           <a:p>
+            <a:pPr>
+              <a:buFont typeface="Wingdings" panose="05000000000000000000" pitchFamily="2" charset="2"/>
+              <a:buChar char="§"/>
+            </a:pPr>
+            <a:r>
+              <a:rPr lang="en-US" sz="2400" dirty="0" smtClean="0">
+                <a:solidFill>
+                  <a:schemeClr val="tx1">
+                    <a:lumMod val="65000"/>
+                    <a:lumOff val="35000"/>
+                  </a:schemeClr>
+                </a:solidFill>
+              </a:rPr>
+              <a:t> A </a:t>
+            </a:r>
             <a:r>
               <a:rPr lang="en-US" sz="2400" dirty="0">
                 <a:solidFill>
                   <a:schemeClr val="tx1">
-                    <a:lumMod val="50000"/>
-                    <a:lumOff val="50000"/>
+                    <a:lumMod val="65000"/>
+                    <a:lumOff val="35000"/>
                   </a:schemeClr>
                 </a:solidFill>
               </a:rPr>
-              <a:t>Random fields and the </a:t>
+              <a:t>simple picture with </a:t>
             </a:r>
             <a:r>
               <a:rPr lang="en-US" sz="2400" dirty="0" err="1">
                 <a:solidFill>
                   <a:schemeClr val="tx1">
-                    <a:lumMod val="50000"/>
-                    <a:lumOff val="50000"/>
+                    <a:lumMod val="65000"/>
+                    <a:lumOff val="35000"/>
                   </a:schemeClr>
                 </a:solidFill>
               </a:rPr>
-              <a:t>Imry</a:t>
+              <a:t>Ising</a:t>
             </a:r>
             <a:r>
               <a:rPr lang="en-US" sz="2400" dirty="0">
                 <a:solidFill>
                   <a:schemeClr val="tx1">
-                    <a:lumMod val="50000"/>
-                    <a:lumOff val="50000"/>
+                    <a:lumMod val="65000"/>
+                    <a:lumOff val="35000"/>
                   </a:schemeClr>
                 </a:solidFill>
               </a:rPr>
-              <a:t>-Ma criterion</a:t>
+              <a:t> spins:</a:t>
             </a:r>
-            <a:endParaRPr lang="x-none" sz="2400" dirty="0">
-              <a:solidFill>
-                <a:schemeClr val="tx1">
-                  <a:lumMod val="50000"/>
-                  <a:lumOff val="50000"/>
-                </a:schemeClr>
-              </a:solidFill>
-            </a:endParaRPr>
           </a:p>
         </p:txBody>
       </p:sp>
@@ -30628,36 +30671,18 @@
           <a:lstStyle/>
           <a:p>
             <a:r>
-              <a:rPr lang="en-US" dirty="0">
-                <a:solidFill>
-                  <a:schemeClr val="accent2">
-                    <a:lumMod val="50000"/>
-                  </a:schemeClr>
-                </a:solidFill>
-              </a:rPr>
-              <a:t>Quenched </a:t>
+              <a:rPr lang="en-US" dirty="0"/>
+              <a:t>Random fields and the </a:t>
+            </a:r>
+            <a:r>
+              <a:rPr lang="en-US" dirty="0" err="1"/>
+              <a:t>Imry</a:t>
             </a:r>
             <a:r>
               <a:rPr lang="en-US" dirty="0"/>
-              <a:t>D</a:t>
+              <a:t>-Ma criterion</a:t>
             </a:r>
-            <a:r>
-              <a:rPr lang="en-US" dirty="0">
-                <a:solidFill>
-                  <a:schemeClr val="accent2">
-                    <a:lumMod val="50000"/>
-                  </a:schemeClr>
-                </a:solidFill>
-              </a:rPr>
-              <a:t>isorder: Random Fields</a:t>
-            </a:r>
-            <a:endParaRPr lang="x-none" dirty="0">
-              <a:solidFill>
-                <a:schemeClr val="accent2">
-                  <a:lumMod val="50000"/>
-                </a:schemeClr>
-              </a:solidFill>
-            </a:endParaRPr>
+            <a:endParaRPr lang="x-none" dirty="0"/>
           </a:p>
         </p:txBody>
       </p:sp>
@@ -30688,45 +30713,6 @@
             <p:txBody>
               <a:bodyPr/>
               <a:lstStyle/>
-              <a:p>
-                <a:pPr>
-                  <a:buFont typeface="Wingdings" panose="05000000000000000000" pitchFamily="2" charset="2"/>
-                  <a:buChar char="§"/>
-                </a:pPr>
-                <a:r>
-                  <a:rPr lang="en-US" dirty="0">
-                    <a:solidFill>
-                      <a:schemeClr val="tx1">
-                        <a:lumMod val="65000"/>
-                        <a:lumOff val="35000"/>
-                      </a:schemeClr>
-                    </a:solidFill>
-                  </a:rPr>
-                  <a:t>A simple picture with </a:t>
-                </a:r>
-                <a:r>
-                  <a:rPr lang="en-US" dirty="0" err="1">
-                    <a:solidFill>
-                      <a:schemeClr val="tx1">
-                        <a:lumMod val="65000"/>
-                        <a:lumOff val="35000"/>
-                      </a:schemeClr>
-                    </a:solidFill>
-                  </a:rPr>
-                  <a:t>Ising</a:t>
-                </a:r>
-                <a:r>
-                  <a:rPr lang="en-US" dirty="0">
-                    <a:solidFill>
-                      <a:schemeClr val="tx1">
-                        <a:lumMod val="65000"/>
-                        <a:lumOff val="35000"/>
-                      </a:schemeClr>
-                    </a:solidFill>
-                  </a:rPr>
-                  <a:t> spins:</a:t>
-                </a:r>
-              </a:p>
               <a:p>
                 <a:pPr marL="1371600" lvl="3" indent="0">
                   <a:buNone/>
@@ -31180,7 +31166,7 @@
               <p:cNvPr id="3" name="Content Placeholder 2">
                 <a:extLst>
                   <a:ext uri="{FF2B5EF4-FFF2-40B4-BE49-F238E27FC236}">
-                    <a16:creationId xmlns:a16="http://schemas.microsoft.com/office/drawing/2014/main" id="{B02DC6DB-79AC-40CC-9EA0-71B012856EA7}"/>
+                    <a16:creationId xmlns:a16="http://schemas.microsoft.com/office/drawing/2014/main" xmlns="" xmlns:a14="http://schemas.microsoft.com/office/drawing/2010/main" id="{B02DC6DB-79AC-40CC-9EA0-71B012856EA7}"/>
                   </a:ext>
                 </a:extLst>
               </p:cNvPr>
@@ -31196,10 +31182,10 @@
                 <a:off x="838200" y="2036603"/>
                 <a:ext cx="10515600" cy="4140360"/>
               </a:xfrm>
-              <a:blipFill>
+              <a:blipFill rotWithShape="0">
                 <a:blip r:embed="rId2"/>
                 <a:stretch>
-                  <a:fillRect l="-1043" t="-2356"/>
+                  <a:fillRect/>
                 </a:stretch>
               </a:blipFill>
             </p:spPr>
@@ -31208,7 +31194,7 @@
               <a:lstStyle/>
               <a:p>
                 <a:r>
-                  <a:rPr lang="LID4096">
+                  <a:rPr lang="en-US">
                     <a:noFill/>
                   </a:rPr>
                   <a:t> </a:t>
@@ -31285,47 +31271,54 @@
           </a:bodyPr>
           <a:lstStyle/>
           <a:p>
+            <a:pPr>
+              <a:buFont typeface="Wingdings" panose="05000000000000000000" pitchFamily="2" charset="2"/>
+              <a:buChar char="§"/>
+            </a:pPr>
+            <a:r>
+              <a:rPr lang="en-US" sz="2400" dirty="0" smtClean="0">
+                <a:solidFill>
+                  <a:schemeClr val="tx1">
+                    <a:lumMod val="65000"/>
+                    <a:lumOff val="35000"/>
+                  </a:schemeClr>
+                </a:solidFill>
+              </a:rPr>
+              <a:t> A </a:t>
+            </a:r>
             <a:r>
               <a:rPr lang="en-US" sz="2400" dirty="0">
                 <a:solidFill>
                   <a:schemeClr val="tx1">
-                    <a:lumMod val="50000"/>
-                    <a:lumOff val="50000"/>
+                    <a:lumMod val="65000"/>
+                    <a:lumOff val="35000"/>
                   </a:schemeClr>
                 </a:solidFill>
               </a:rPr>
-              <a:t>Random fields and the </a:t>
+              <a:t>simple picture with </a:t>
             </a:r>
             <a:r>
               <a:rPr lang="en-US" sz="2400" dirty="0" err="1">
                 <a:solidFill>
                   <a:schemeClr val="tx1">
-                    <a:lumMod val="50000"/>
-                    <a:lumOff val="50000"/>
+                    <a:lumMod val="65000"/>
+                    <a:lumOff val="35000"/>
                   </a:schemeClr>
                 </a:solidFill>
               </a:rPr>
-              <a:t>Imry</a:t>
+              <a:t>Ising</a:t>
             </a:r>
             <a:r>
               <a:rPr lang="en-US" sz="2400" dirty="0">
                 <a:solidFill>
                   <a:schemeClr val="tx1">
-                    <a:lumMod val="50000"/>
-                    <a:lumOff val="50000"/>
+                    <a:lumMod val="65000"/>
+                    <a:lumOff val="35000"/>
                   </a:schemeClr>
                 </a:solidFill>
               </a:rPr>
-              <a:t>-Ma criterion</a:t>
+              <a:t> spins:</a:t>
             </a:r>
-            <a:endParaRPr lang="x-none" sz="2400" dirty="0">
-              <a:solidFill>
-                <a:schemeClr val="tx1">
-                  <a:lumMod val="50000"/>
-                  <a:lumOff val="50000"/>
-                </a:schemeClr>
-              </a:solidFill>
-            </a:endParaRPr>
           </a:p>
         </p:txBody>
       </p:sp>
@@ -34231,22 +34224,18 @@
           <a:lstStyle/>
           <a:p>
             <a:r>
-              <a:rPr lang="en-US" dirty="0">
-                <a:solidFill>
-                  <a:schemeClr val="accent2">
-                    <a:lumMod val="50000"/>
-                  </a:schemeClr>
-                </a:solidFill>
-              </a:rPr>
-              <a:t>Quenched Disorder: Random Fields</a:t>
+              <a:rPr lang="en-US" dirty="0"/>
+              <a:t>Random fields and the </a:t>
             </a:r>
-            <a:endParaRPr lang="x-none" dirty="0">
-              <a:solidFill>
-                <a:schemeClr val="accent2">
-                  <a:lumMod val="50000"/>
-                </a:schemeClr>
-              </a:solidFill>
-            </a:endParaRPr>
+            <a:r>
+              <a:rPr lang="en-US" dirty="0" err="1"/>
+              <a:t>Imry</a:t>
+            </a:r>
+            <a:r>
+              <a:rPr lang="en-US" dirty="0"/>
+              <a:t>-Ma criterion</a:t>
+            </a:r>
+            <a:endParaRPr lang="x-none" dirty="0"/>
           </a:p>
         </p:txBody>
       </p:sp>
@@ -34276,48 +34265,9 @@
             </p:spPr>
             <p:txBody>
               <a:bodyPr>
-                <a:normAutofit lnSpcReduction="10000"/>
+                <a:normAutofit/>
               </a:bodyPr>
               <a:lstStyle/>
-              <a:p>
-                <a:pPr>
-                  <a:buFont typeface="Wingdings" panose="05000000000000000000" pitchFamily="2" charset="2"/>
-                  <a:buChar char="§"/>
-                </a:pPr>
-                <a:r>
-                  <a:rPr lang="en-US" dirty="0">
-                    <a:solidFill>
-                      <a:schemeClr val="tx1">
-                        <a:lumMod val="65000"/>
-                        <a:lumOff val="35000"/>
-                      </a:schemeClr>
-                    </a:solidFill>
-                  </a:rPr>
-                  <a:t>A simple picture with </a:t>
-                </a:r>
-                <a:r>
-                  <a:rPr lang="en-US" dirty="0" err="1">
-                    <a:solidFill>
-                      <a:schemeClr val="tx1">
-                        <a:lumMod val="65000"/>
-                        <a:lumOff val="35000"/>
-                      </a:schemeClr>
-                    </a:solidFill>
-                  </a:rPr>
-                  <a:t>Ising</a:t>
-                </a:r>
-                <a:r>
-                  <a:rPr lang="en-US" dirty="0">
-                    <a:solidFill>
-                      <a:schemeClr val="tx1">
-                        <a:lumMod val="65000"/>
-                        <a:lumOff val="35000"/>
-                      </a:schemeClr>
-                    </a:solidFill>
-                  </a:rPr>
-                  <a:t> spins:</a:t>
-                </a:r>
-              </a:p>
               <a:p>
                 <a:pPr marL="1371600" lvl="3" indent="0">
                   <a:buNone/>
@@ -34910,7 +34860,7 @@
               <p:cNvPr id="3" name="Content Placeholder 2">
                 <a:extLst>
                   <a:ext uri="{FF2B5EF4-FFF2-40B4-BE49-F238E27FC236}">
-                    <a16:creationId xmlns:a16="http://schemas.microsoft.com/office/drawing/2014/main" id="{B02DC6DB-79AC-40CC-9EA0-71B012856EA7}"/>
+                    <a16:creationId xmlns:a16="http://schemas.microsoft.com/office/drawing/2014/main" xmlns="" xmlns:a14="http://schemas.microsoft.com/office/drawing/2010/main" id="{B02DC6DB-79AC-40CC-9EA0-71B012856EA7}"/>
                   </a:ext>
                 </a:extLst>
               </p:cNvPr>
@@ -34926,10 +34876,10 @@
                 <a:off x="838200" y="2036603"/>
                 <a:ext cx="10515600" cy="4140360"/>
               </a:xfrm>
-              <a:blipFill>
+              <a:blipFill rotWithShape="0">
                 <a:blip r:embed="rId2"/>
                 <a:stretch>
-                  <a:fillRect l="-1043" t="-3240" b="-2504"/>
+                  <a:fillRect b="-1473"/>
                 </a:stretch>
               </a:blipFill>
             </p:spPr>
@@ -34938,7 +34888,7 @@
               <a:lstStyle/>
               <a:p>
                 <a:r>
-                  <a:rPr lang="LID4096">
+                  <a:rPr lang="en-US">
                     <a:noFill/>
                   </a:rPr>
                   <a:t> </a:t>
@@ -35015,47 +34965,54 @@
           </a:bodyPr>
           <a:lstStyle/>
           <a:p>
+            <a:pPr>
+              <a:buFont typeface="Wingdings" panose="05000000000000000000" pitchFamily="2" charset="2"/>
+              <a:buChar char="§"/>
+            </a:pPr>
+            <a:r>
+              <a:rPr lang="en-US" sz="2400" dirty="0" smtClean="0">
+                <a:solidFill>
+                  <a:schemeClr val="tx1">
+                    <a:lumMod val="65000"/>
+                    <a:lumOff val="35000"/>
+                  </a:schemeClr>
+                </a:solidFill>
+              </a:rPr>
+              <a:t> A </a:t>
+            </a:r>
             <a:r>
               <a:rPr lang="en-US" sz="2400" dirty="0">
                 <a:solidFill>
                   <a:schemeClr val="tx1">
-                    <a:lumMod val="50000"/>
-                    <a:lumOff val="50000"/>
+                    <a:lumMod val="65000"/>
+                    <a:lumOff val="35000"/>
                   </a:schemeClr>
                 </a:solidFill>
               </a:rPr>
-              <a:t>Random fields and the </a:t>
+              <a:t>simple picture with </a:t>
             </a:r>
             <a:r>
               <a:rPr lang="en-US" sz="2400" dirty="0" err="1">
                 <a:solidFill>
                   <a:schemeClr val="tx1">
-                    <a:lumMod val="50000"/>
-                    <a:lumOff val="50000"/>
+                    <a:lumMod val="65000"/>
+                    <a:lumOff val="35000"/>
                   </a:schemeClr>
                 </a:solidFill>
               </a:rPr>
-              <a:t>Imry</a:t>
+              <a:t>Ising</a:t>
             </a:r>
             <a:r>
               <a:rPr lang="en-US" sz="2400" dirty="0">
                 <a:solidFill>
                   <a:schemeClr val="tx1">
-                    <a:lumMod val="50000"/>
-                    <a:lumOff val="50000"/>
+                    <a:lumMod val="65000"/>
+                    <a:lumOff val="35000"/>
                   </a:schemeClr>
                 </a:solidFill>
               </a:rPr>
-              <a:t>-Ma criterion</a:t>
+              <a:t> spins:</a:t>
             </a:r>
-            <a:endParaRPr lang="x-none" sz="2400" dirty="0">
-              <a:solidFill>
-                <a:schemeClr val="tx1">
-                  <a:lumMod val="50000"/>
-                  <a:lumOff val="50000"/>
-                </a:schemeClr>
-              </a:solidFill>
-            </a:endParaRPr>
           </a:p>
         </p:txBody>
       </p:sp>
@@ -37894,14 +37851,16 @@
           <a:lstStyle/>
           <a:p>
             <a:r>
-              <a:rPr lang="en-US" dirty="0">
-                <a:solidFill>
-                  <a:schemeClr val="accent2">
-                    <a:lumMod val="50000"/>
-                  </a:schemeClr>
-                </a:solidFill>
-              </a:rPr>
-              <a:t>Quenched Disorder: Random Fields</a:t>
+              <a:rPr lang="en-US" dirty="0"/>
+              <a:t>Random fields and the </a:t>
+            </a:r>
+            <a:r>
+              <a:rPr lang="en-US" dirty="0" err="1"/>
+              <a:t>Imry</a:t>
+            </a:r>
+            <a:r>
+              <a:rPr lang="en-US" dirty="0"/>
+              <a:t>-Ma criterion</a:t>
             </a:r>
             <a:endParaRPr lang="x-none" dirty="0">
               <a:solidFill>
@@ -37939,26 +37898,9 @@
             </p:spPr>
             <p:txBody>
               <a:bodyPr>
-                <a:normAutofit lnSpcReduction="10000"/>
+                <a:normAutofit/>
               </a:bodyPr>
               <a:lstStyle/>
-              <a:p>
-                <a:pPr>
-                  <a:buFont typeface="Wingdings" panose="05000000000000000000" pitchFamily="2" charset="2"/>
-                  <a:buChar char="§"/>
-                </a:pPr>
-                <a:r>
-                  <a:rPr lang="en-US" dirty="0">
-                    <a:solidFill>
-                      <a:schemeClr val="tx1">
-                        <a:lumMod val="65000"/>
-                        <a:lumOff val="35000"/>
-                      </a:schemeClr>
-                    </a:solidFill>
-                  </a:rPr>
-                  <a:t>For continuous symmetries:</a:t>
-                </a:r>
-              </a:p>
               <a:p>
                 <a:pPr marL="1371600" lvl="3" indent="0">
                   <a:buNone/>
@@ -38655,7 +38597,7 @@
               <p:cNvPr id="3" name="Content Placeholder 2">
                 <a:extLst>
                   <a:ext uri="{FF2B5EF4-FFF2-40B4-BE49-F238E27FC236}">
-                    <a16:creationId xmlns:a16="http://schemas.microsoft.com/office/drawing/2014/main" id="{B02DC6DB-79AC-40CC-9EA0-71B012856EA7}"/>
+                    <a16:creationId xmlns:a16="http://schemas.microsoft.com/office/drawing/2014/main" xmlns="" xmlns:a14="http://schemas.microsoft.com/office/drawing/2010/main" id="{B02DC6DB-79AC-40CC-9EA0-71B012856EA7}"/>
                   </a:ext>
                 </a:extLst>
               </p:cNvPr>
@@ -38671,10 +38613,10 @@
                 <a:off x="838200" y="2036603"/>
                 <a:ext cx="10515600" cy="4140360"/>
               </a:xfrm>
-              <a:blipFill>
+              <a:blipFill rotWithShape="0">
                 <a:blip r:embed="rId2"/>
                 <a:stretch>
-                  <a:fillRect l="-1043" t="-3240"/>
+                  <a:fillRect t="-3093"/>
                 </a:stretch>
               </a:blipFill>
             </p:spPr>
@@ -38683,7 +38625,7 @@
               <a:lstStyle/>
               <a:p>
                 <a:r>
-                  <a:rPr lang="LID4096">
+                  <a:rPr lang="en-US">
                     <a:noFill/>
                   </a:rPr>
                   <a:t> </a:t>
@@ -38760,47 +38702,32 @@
           </a:bodyPr>
           <a:lstStyle/>
           <a:p>
+            <a:pPr>
+              <a:buFont typeface="Wingdings" panose="05000000000000000000" pitchFamily="2" charset="2"/>
+              <a:buChar char="§"/>
+            </a:pPr>
             <a:r>
-              <a:rPr lang="en-US" sz="2400" dirty="0">
+              <a:rPr lang="en-US" sz="2400" dirty="0" smtClean="0">
                 <a:solidFill>
                   <a:schemeClr val="tx1">
-                    <a:lumMod val="50000"/>
-                    <a:lumOff val="50000"/>
+                    <a:lumMod val="65000"/>
+                    <a:lumOff val="35000"/>
                   </a:schemeClr>
                 </a:solidFill>
               </a:rPr>
-              <a:t>Random fields and the </a:t>
-            </a:r>
-            <a:r>
-              <a:rPr lang="en-US" sz="2400" dirty="0" err="1">
-                <a:solidFill>
-                  <a:schemeClr val="tx1">
-                    <a:lumMod val="50000"/>
-                    <a:lumOff val="50000"/>
-                  </a:schemeClr>
-                </a:solidFill>
-              </a:rPr>
-              <a:t>Imry</a:t>
+              <a:t> For </a:t>
             </a:r>
             <a:r>
               <a:rPr lang="en-US" sz="2400" dirty="0">
                 <a:solidFill>
                   <a:schemeClr val="tx1">
-                    <a:lumMod val="50000"/>
-                    <a:lumOff val="50000"/>
+                    <a:lumMod val="65000"/>
+                    <a:lumOff val="35000"/>
                   </a:schemeClr>
                 </a:solidFill>
               </a:rPr>
-              <a:t>-Ma criterion</a:t>
+              <a:t>continuous symmetries:</a:t>
             </a:r>
-            <a:endParaRPr lang="x-none" sz="2400" dirty="0">
-              <a:solidFill>
-                <a:schemeClr val="tx1">
-                  <a:lumMod val="50000"/>
-                  <a:lumOff val="50000"/>
-                </a:schemeClr>
-              </a:solidFill>
-            </a:endParaRPr>
           </a:p>
         </p:txBody>
       </p:sp>
@@ -42124,22 +42051,10 @@
           <a:lstStyle/>
           <a:p>
             <a:r>
-              <a:rPr lang="en-US" dirty="0">
-                <a:solidFill>
-                  <a:schemeClr val="accent2">
-                    <a:lumMod val="50000"/>
-                  </a:schemeClr>
-                </a:solidFill>
-              </a:rPr>
-              <a:t>Quenched Disorder: Random Fields</a:t>
+              <a:rPr lang="en-US" dirty="0"/>
+              <a:t>Random fields and the infrared divergence</a:t>
             </a:r>
-            <a:endParaRPr lang="x-none" dirty="0">
-              <a:solidFill>
-                <a:schemeClr val="accent2">
-                  <a:lumMod val="50000"/>
-                </a:schemeClr>
-              </a:solidFill>
-            </a:endParaRPr>
+            <a:endParaRPr lang="x-none" dirty="0"/>
           </a:p>
         </p:txBody>
       </p:sp>
@@ -42178,38 +42093,7 @@
                   <a:buChar char="§"/>
                 </a:pPr>
                 <a:r>
-                  <a:rPr lang="en-US" dirty="0">
-                    <a:solidFill>
-                      <a:schemeClr val="tx1">
-                        <a:lumMod val="65000"/>
-                        <a:lumOff val="35000"/>
-                      </a:schemeClr>
-                    </a:solidFill>
-                  </a:rPr>
-                  <a:t>For continuous symmetries:</a:t>
-                </a:r>
-              </a:p>
-              <a:p>
-                <a:pPr lvl="1">
-                  <a:lnSpc>
-                    <a:spcPct val="100000"/>
-                  </a:lnSpc>
-                  <a:buFont typeface="Courier New" panose="02070309020205020404" pitchFamily="49" charset="0"/>
-                  <a:buChar char="o"/>
-                </a:pPr>
-                <a:r>
-                  <a:rPr lang="en-US" dirty="0">
-                    <a:solidFill>
-                      <a:schemeClr val="tx1">
-                        <a:lumMod val="65000"/>
-                        <a:lumOff val="35000"/>
-                      </a:schemeClr>
-                    </a:solidFill>
-                  </a:rPr>
-                  <a:t> </a:t>
-                </a:r>
-                <a:r>
-                  <a:rPr lang="en-US" sz="2000" dirty="0">
+                  <a:rPr lang="en-US" sz="2000" dirty="0" smtClean="0">
                     <a:solidFill>
                       <a:schemeClr val="tx1">
                         <a:lumMod val="85000"/>
@@ -42228,7 +42112,7 @@
                   <a:buNone/>
                 </a:pPr>
                 <a:r>
-                  <a:rPr lang="en-US" sz="2000" dirty="0">
+                  <a:rPr lang="en-US" sz="2000" dirty="0" smtClean="0">
                     <a:solidFill>
                       <a:schemeClr val="tx1">
                         <a:lumMod val="85000"/>
@@ -45257,7 +45141,7 @@
               <p:cNvPr id="3" name="Content Placeholder 2">
                 <a:extLst>
                   <a:ext uri="{FF2B5EF4-FFF2-40B4-BE49-F238E27FC236}">
-                    <a16:creationId xmlns:a16="http://schemas.microsoft.com/office/drawing/2014/main" id="{B02DC6DB-79AC-40CC-9EA0-71B012856EA7}"/>
+                    <a16:creationId xmlns:a16="http://schemas.microsoft.com/office/drawing/2014/main" xmlns="" xmlns:a14="http://schemas.microsoft.com/office/drawing/2010/main" id="{B02DC6DB-79AC-40CC-9EA0-71B012856EA7}"/>
                   </a:ext>
                 </a:extLst>
               </p:cNvPr>
@@ -45273,10 +45157,10 @@
                 <a:off x="838200" y="2036603"/>
                 <a:ext cx="10515600" cy="4140360"/>
               </a:xfrm>
-              <a:blipFill>
+              <a:blipFill rotWithShape="0">
                 <a:blip r:embed="rId2"/>
                 <a:stretch>
-                  <a:fillRect l="-1043" t="-2356"/>
+                  <a:fillRect l="-522" t="-1473"/>
                 </a:stretch>
               </a:blipFill>
             </p:spPr>
@@ -45285,7 +45169,7 @@
               <a:lstStyle/>
               <a:p>
                 <a:r>
-                  <a:rPr lang="LID4096">
+                  <a:rPr lang="en-US">
                     <a:noFill/>
                   </a:rPr>
                   <a:t> </a:t>
@@ -45362,22 +45246,26 @@
           </a:bodyPr>
           <a:lstStyle/>
           <a:p>
+            <a:pPr>
+              <a:buFont typeface="Wingdings" panose="05000000000000000000" pitchFamily="2" charset="2"/>
+              <a:buChar char="§"/>
+            </a:pPr>
             <a:r>
-              <a:rPr lang="en-US" sz="2400" dirty="0">
+              <a:rPr lang="en-US" sz="2400" dirty="0" smtClean="0">
                 <a:solidFill>
                   <a:schemeClr val="tx1">
-                    <a:lumMod val="50000"/>
-                    <a:lumOff val="50000"/>
+                    <a:lumMod val="65000"/>
+                    <a:lumOff val="35000"/>
                   </a:schemeClr>
                 </a:solidFill>
               </a:rPr>
-              <a:t>Random fields and the infrared divergence</a:t>
+              <a:t> Goldstone modes and diverging susceptibility:</a:t>
             </a:r>
-            <a:endParaRPr lang="x-none" sz="2400" dirty="0">
+            <a:endParaRPr lang="en-US" sz="2400" dirty="0">
               <a:solidFill>
                 <a:schemeClr val="tx1">
-                  <a:lumMod val="50000"/>
-                  <a:lumOff val="50000"/>
+                  <a:lumMod val="65000"/>
+                  <a:lumOff val="35000"/>
                 </a:schemeClr>
               </a:solidFill>
             </a:endParaRPr>
